--- a/presentation/team_11_slides.pptx
+++ b/presentation/team_11_slides.pptx
@@ -3094,14 +3094,112 @@
       <p:grpSpPr/>
       <p:sp>
         <p:nvSpPr>
-          <p:cNvPr id="2" name="TextBox 1"/>
+          <p:cNvPr id="2" name="Rectangle 1"/>
+          <p:cNvSpPr/>
+          <p:nvPr/>
+        </p:nvSpPr>
+        <p:spPr>
+          <a:xfrm>
+            <a:off x="0" y="0"/>
+            <a:ext cx="12191695" cy="6858000"/>
+          </a:xfrm>
+          <a:prstGeom prst="rect">
+            <a:avLst/>
+          </a:prstGeom>
+          <a:solidFill>
+            <a:srgbClr val="FAF9F5"/>
+          </a:solidFill>
+          <a:ln>
+            <a:noFill/>
+          </a:ln>
+        </p:spPr>
+        <p:style>
+          <a:lnRef idx="1">
+            <a:schemeClr val="accent1"/>
+          </a:lnRef>
+          <a:fillRef idx="3">
+            <a:schemeClr val="accent1"/>
+          </a:fillRef>
+          <a:effectRef idx="2">
+            <a:schemeClr val="accent1"/>
+          </a:effectRef>
+          <a:fontRef idx="minor">
+            <a:schemeClr val="lt1"/>
+          </a:fontRef>
+        </p:style>
+        <p:txBody>
+          <a:bodyPr rtlCol="0" anchor="ctr"/>
+          <a:lstStyle/>
+          <a:p>
+            <a:pPr algn="ctr"/>
+          </a:p>
+        </p:txBody>
+      </p:sp>
+      <p:sp>
+        <p:nvSpPr>
+          <p:cNvPr id="3" name="Rounded Rectangle 2"/>
+          <p:cNvSpPr/>
+          <p:nvPr/>
+        </p:nvSpPr>
+        <p:spPr>
+          <a:xfrm>
+            <a:off x="548640" y="384048"/>
+            <a:ext cx="3520440" cy="292608"/>
+          </a:xfrm>
+          <a:prstGeom prst="roundRect">
+            <a:avLst/>
+          </a:prstGeom>
+          <a:solidFill>
+            <a:srgbClr val="ECFDF5"/>
+          </a:solidFill>
+          <a:ln w="12700">
+            <a:solidFill>
+              <a:srgbClr val="065F46"/>
+            </a:solidFill>
+          </a:ln>
+        </p:spPr>
+        <p:style>
+          <a:lnRef idx="1">
+            <a:schemeClr val="accent1"/>
+          </a:lnRef>
+          <a:fillRef idx="3">
+            <a:schemeClr val="accent1"/>
+          </a:fillRef>
+          <a:effectRef idx="2">
+            <a:schemeClr val="accent1"/>
+          </a:effectRef>
+          <a:fontRef idx="minor">
+            <a:schemeClr val="lt1"/>
+          </a:fontRef>
+        </p:style>
+        <p:txBody>
+          <a:bodyPr rtlCol="0" anchor="ctr" wrap="none" tIns="25400" bIns="25400" lIns="101600" rIns="101600"/>
+          <a:lstStyle/>
+          <a:p>
+            <a:pPr algn="ctr">
+              <a:defRPr sz="950" b="1">
+                <a:solidFill>
+                  <a:srgbClr val="065F46"/>
+                </a:solidFill>
+                <a:latin typeface="Calibri"/>
+              </a:defRPr>
+            </a:pPr>
+            <a:r>
+              <a:t>DELIVERABLE F | 5-MINUTE PITCH DECK</a:t>
+            </a:r>
+          </a:p>
+        </p:txBody>
+      </p:sp>
+      <p:sp>
+        <p:nvSpPr>
+          <p:cNvPr id="4" name="TextBox 3"/>
           <p:cNvSpPr txBox="1"/>
           <p:nvPr/>
         </p:nvSpPr>
         <p:spPr>
           <a:xfrm>
-            <a:off x="731520" y="548640"/>
-            <a:ext cx="10698480" cy="1097280"/>
+            <a:off x="548640" y="713232"/>
+            <a:ext cx="11091672" cy="868680"/>
           </a:xfrm>
           <a:prstGeom prst="rect">
             <a:avLst/>
@@ -3109,30 +3207,94 @@
           <a:noFill/>
         </p:spPr>
         <p:txBody>
-          <a:bodyPr wrap="none">
+          <a:bodyPr wrap="square" lIns="0" rIns="0" tIns="0" bIns="0">
             <a:spAutoFit/>
           </a:bodyPr>
           <a:lstStyle/>
           <a:p>
             <a:pPr>
-              <a:defRPr sz="2800" b="1"/>
-            </a:pPr>
-            <a:r>
-              <a:t>Ethiopian Smallholder Crop-Yield Challenge</a:t>
-            </a:r>
-          </a:p>
-        </p:txBody>
-      </p:sp>
-      <p:sp>
-        <p:nvSpPr>
-          <p:cNvPr id="3" name="TextBox 2"/>
+              <a:defRPr sz="2100" b="1">
+                <a:solidFill>
+                  <a:srgbClr val="143D2B"/>
+                </a:solidFill>
+                <a:latin typeface="Calibri"/>
+              </a:defRPr>
+            </a:pPr>
+            <a:r>
+              <a:t>Predicting Ethiopian Smallholder Crop Yields</a:t>
+            </a:r>
+          </a:p>
+          <a:p>
+            <a:pPr>
+              <a:spcBef>
+                <a:spcPts val="200"/>
+              </a:spcBef>
+              <a:defRPr sz="1150">
+                <a:solidFill>
+                  <a:srgbClr val="64748B"/>
+                </a:solidFill>
+                <a:latin typeface="Calibri"/>
+              </a:defRPr>
+            </a:pPr>
+            <a:r>
+              <a:t>Team 11 | Qiyas / IADE Training Program — Addis Ababa University AI Hackathon (Oct 2026)</a:t>
+            </a:r>
+          </a:p>
+        </p:txBody>
+      </p:sp>
+      <p:sp>
+        <p:nvSpPr>
+          <p:cNvPr id="5" name="Rectangle 4"/>
+          <p:cNvSpPr/>
+          <p:nvPr/>
+        </p:nvSpPr>
+        <p:spPr>
+          <a:xfrm>
+            <a:off x="548640" y="6419088"/>
+            <a:ext cx="11091672" cy="13716"/>
+          </a:xfrm>
+          <a:prstGeom prst="rect">
+            <a:avLst/>
+          </a:prstGeom>
+          <a:solidFill>
+            <a:srgbClr val="E2E8F0"/>
+          </a:solidFill>
+          <a:ln>
+            <a:noFill/>
+          </a:ln>
+        </p:spPr>
+        <p:style>
+          <a:lnRef idx="1">
+            <a:schemeClr val="accent1"/>
+          </a:lnRef>
+          <a:fillRef idx="3">
+            <a:schemeClr val="accent1"/>
+          </a:fillRef>
+          <a:effectRef idx="2">
+            <a:schemeClr val="accent1"/>
+          </a:effectRef>
+          <a:fontRef idx="minor">
+            <a:schemeClr val="lt1"/>
+          </a:fontRef>
+        </p:style>
+        <p:txBody>
+          <a:bodyPr rtlCol="0" anchor="ctr"/>
+          <a:lstStyle/>
+          <a:p>
+            <a:pPr algn="ctr"/>
+          </a:p>
+        </p:txBody>
+      </p:sp>
+      <p:sp>
+        <p:nvSpPr>
+          <p:cNvPr id="6" name="TextBox 5"/>
           <p:cNvSpPr txBox="1"/>
           <p:nvPr/>
         </p:nvSpPr>
         <p:spPr>
           <a:xfrm>
-            <a:off x="731520" y="1645920"/>
-            <a:ext cx="10698480" cy="4572000"/>
+            <a:off x="548640" y="6455664"/>
+            <a:ext cx="7772400" cy="320040"/>
           </a:xfrm>
           <a:prstGeom prst="rect">
             <a:avLst/>
@@ -3140,29 +3302,1245 @@
           <a:noFill/>
         </p:spPr>
         <p:txBody>
-          <a:bodyPr wrap="none">
+          <a:bodyPr wrap="none" lIns="0" tIns="0">
             <a:spAutoFit/>
           </a:bodyPr>
           <a:lstStyle/>
           <a:p>
             <a:pPr>
-              <a:defRPr sz="1800"/>
-            </a:pPr>
-            <a:r>
-              <a:t>Team 11 | Qiyas AAU IADE Hackathon 2026</a:t>
-            </a:r>
-            <a:br/>
-            <a:r>
-              <a:t>Slide 1: Problem Definition and Data Context</a:t>
-            </a:r>
-            <a:br/>
-            <a:br/>
-            <a:r>
-              <a:t>- Predicting smallholder crop yields across 5 Ethiopian regions</a:t>
-            </a:r>
-            <a:br/>
-            <a:r>
-              <a:t>- Integrating plot surveys with regional weather and market commodity prices</a:t>
+              <a:defRPr sz="900">
+                <a:solidFill>
+                  <a:srgbClr val="64748B"/>
+                </a:solidFill>
+                <a:latin typeface="Calibri"/>
+              </a:defRPr>
+            </a:pPr>
+            <a:r>
+              <a:t>Team 11 | Ethiopian Smallholder Crop-Yield Challenge | AAU AI Hackathon 2026</a:t>
+            </a:r>
+          </a:p>
+        </p:txBody>
+      </p:sp>
+      <p:sp>
+        <p:nvSpPr>
+          <p:cNvPr id="7" name="TextBox 6"/>
+          <p:cNvSpPr txBox="1"/>
+          <p:nvPr/>
+        </p:nvSpPr>
+        <p:spPr>
+          <a:xfrm>
+            <a:off x="9811512" y="6455664"/>
+            <a:ext cx="1828800" cy="320040"/>
+          </a:xfrm>
+          <a:prstGeom prst="rect">
+            <a:avLst/>
+          </a:prstGeom>
+          <a:noFill/>
+        </p:spPr>
+        <p:txBody>
+          <a:bodyPr wrap="none" rIns="0" tIns="0">
+            <a:spAutoFit/>
+          </a:bodyPr>
+          <a:lstStyle/>
+          <a:p>
+            <a:pPr algn="r">
+              <a:defRPr sz="900" b="1">
+                <a:solidFill>
+                  <a:srgbClr val="143D2B"/>
+                </a:solidFill>
+                <a:latin typeface="Calibri"/>
+              </a:defRPr>
+            </a:pPr>
+            <a:r>
+              <a:t>Slide 1 of 5</a:t>
+            </a:r>
+          </a:p>
+        </p:txBody>
+      </p:sp>
+      <p:sp>
+        <p:nvSpPr>
+          <p:cNvPr id="8" name="Rounded Rectangle 7"/>
+          <p:cNvSpPr/>
+          <p:nvPr/>
+        </p:nvSpPr>
+        <p:spPr>
+          <a:xfrm>
+            <a:off x="548640" y="1645920"/>
+            <a:ext cx="3575304" cy="914400"/>
+          </a:xfrm>
+          <a:prstGeom prst="roundRect">
+            <a:avLst/>
+          </a:prstGeom>
+          <a:solidFill>
+            <a:srgbClr val="FFFFFF"/>
+          </a:solidFill>
+          <a:ln w="12700">
+            <a:solidFill>
+              <a:srgbClr val="E2E8F0"/>
+            </a:solidFill>
+          </a:ln>
+        </p:spPr>
+        <p:style>
+          <a:lnRef idx="1">
+            <a:schemeClr val="accent1"/>
+          </a:lnRef>
+          <a:fillRef idx="3">
+            <a:schemeClr val="accent1"/>
+          </a:fillRef>
+          <a:effectRef idx="2">
+            <a:schemeClr val="accent1"/>
+          </a:effectRef>
+          <a:fontRef idx="minor">
+            <a:schemeClr val="lt1"/>
+          </a:fontRef>
+        </p:style>
+        <p:txBody>
+          <a:bodyPr rtlCol="0" anchor="ctr"/>
+          <a:lstStyle/>
+          <a:p>
+            <a:pPr algn="ctr"/>
+          </a:p>
+        </p:txBody>
+      </p:sp>
+      <p:sp>
+        <p:nvSpPr>
+          <p:cNvPr id="9" name="Rounded Rectangle 8"/>
+          <p:cNvSpPr/>
+          <p:nvPr/>
+        </p:nvSpPr>
+        <p:spPr>
+          <a:xfrm>
+            <a:off x="548640" y="1645920"/>
+            <a:ext cx="3575304" cy="54864"/>
+          </a:xfrm>
+          <a:prstGeom prst="roundRect">
+            <a:avLst/>
+          </a:prstGeom>
+          <a:solidFill>
+            <a:srgbClr val="15803D"/>
+          </a:solidFill>
+          <a:ln>
+            <a:noFill/>
+          </a:ln>
+        </p:spPr>
+        <p:style>
+          <a:lnRef idx="1">
+            <a:schemeClr val="accent1"/>
+          </a:lnRef>
+          <a:fillRef idx="3">
+            <a:schemeClr val="accent1"/>
+          </a:fillRef>
+          <a:effectRef idx="2">
+            <a:schemeClr val="accent1"/>
+          </a:effectRef>
+          <a:fontRef idx="minor">
+            <a:schemeClr val="lt1"/>
+          </a:fontRef>
+        </p:style>
+        <p:txBody>
+          <a:bodyPr rtlCol="0" anchor="ctr"/>
+          <a:lstStyle/>
+          <a:p>
+            <a:pPr algn="ctr"/>
+          </a:p>
+        </p:txBody>
+      </p:sp>
+      <p:sp>
+        <p:nvSpPr>
+          <p:cNvPr id="10" name="TextBox 9"/>
+          <p:cNvSpPr txBox="1"/>
+          <p:nvPr/>
+        </p:nvSpPr>
+        <p:spPr>
+          <a:xfrm>
+            <a:off x="548640" y="1719072"/>
+            <a:ext cx="3575304" cy="822960"/>
+          </a:xfrm>
+          <a:prstGeom prst="rect">
+            <a:avLst/>
+          </a:prstGeom>
+          <a:noFill/>
+        </p:spPr>
+        <p:txBody>
+          <a:bodyPr wrap="square" lIns="127000" rIns="127000" tIns="50800" bIns="50800">
+            <a:spAutoFit/>
+          </a:bodyPr>
+          <a:lstStyle/>
+          <a:p>
+            <a:pPr>
+              <a:defRPr sz="2100" b="1">
+                <a:solidFill>
+                  <a:srgbClr val="15803D"/>
+                </a:solidFill>
+                <a:latin typeface="Calibri"/>
+              </a:defRPr>
+            </a:pPr>
+            <a:r>
+              <a:t>15,090 Plots</a:t>
+            </a:r>
+          </a:p>
+          <a:p>
+            <a:pPr>
+              <a:spcBef>
+                <a:spcPts val="100"/>
+              </a:spcBef>
+              <a:defRPr sz="1000" b="1">
+                <a:solidFill>
+                  <a:srgbClr val="0F172A"/>
+                </a:solidFill>
+                <a:latin typeface="Calibri"/>
+              </a:defRPr>
+            </a:pPr>
+            <a:r>
+              <a:t>Master Smallholder Survey Records</a:t>
+            </a:r>
+          </a:p>
+          <a:p>
+            <a:pPr>
+              <a:spcBef>
+                <a:spcPts val="100"/>
+              </a:spcBef>
+              <a:defRPr sz="850">
+                <a:solidFill>
+                  <a:srgbClr val="64748B"/>
+                </a:solidFill>
+                <a:latin typeface="Calibri"/>
+              </a:defRPr>
+            </a:pPr>
+            <a:r>
+              <a:t>5 Administrative Regions × 5 Primary Food Security Crops</a:t>
+            </a:r>
+          </a:p>
+        </p:txBody>
+      </p:sp>
+      <p:sp>
+        <p:nvSpPr>
+          <p:cNvPr id="11" name="Rounded Rectangle 10"/>
+          <p:cNvSpPr/>
+          <p:nvPr/>
+        </p:nvSpPr>
+        <p:spPr>
+          <a:xfrm>
+            <a:off x="4306824" y="1645920"/>
+            <a:ext cx="3575304" cy="914400"/>
+          </a:xfrm>
+          <a:prstGeom prst="roundRect">
+            <a:avLst/>
+          </a:prstGeom>
+          <a:solidFill>
+            <a:srgbClr val="FFFFFF"/>
+          </a:solidFill>
+          <a:ln w="12700">
+            <a:solidFill>
+              <a:srgbClr val="E2E8F0"/>
+            </a:solidFill>
+          </a:ln>
+        </p:spPr>
+        <p:style>
+          <a:lnRef idx="1">
+            <a:schemeClr val="accent1"/>
+          </a:lnRef>
+          <a:fillRef idx="3">
+            <a:schemeClr val="accent1"/>
+          </a:fillRef>
+          <a:effectRef idx="2">
+            <a:schemeClr val="accent1"/>
+          </a:effectRef>
+          <a:fontRef idx="minor">
+            <a:schemeClr val="lt1"/>
+          </a:fontRef>
+        </p:style>
+        <p:txBody>
+          <a:bodyPr rtlCol="0" anchor="ctr"/>
+          <a:lstStyle/>
+          <a:p>
+            <a:pPr algn="ctr"/>
+          </a:p>
+        </p:txBody>
+      </p:sp>
+      <p:sp>
+        <p:nvSpPr>
+          <p:cNvPr id="12" name="Rounded Rectangle 11"/>
+          <p:cNvSpPr/>
+          <p:nvPr/>
+        </p:nvSpPr>
+        <p:spPr>
+          <a:xfrm>
+            <a:off x="4306824" y="1645920"/>
+            <a:ext cx="3575304" cy="54864"/>
+          </a:xfrm>
+          <a:prstGeom prst="roundRect">
+            <a:avLst/>
+          </a:prstGeom>
+          <a:solidFill>
+            <a:srgbClr val="D97706"/>
+          </a:solidFill>
+          <a:ln>
+            <a:noFill/>
+          </a:ln>
+        </p:spPr>
+        <p:style>
+          <a:lnRef idx="1">
+            <a:schemeClr val="accent1"/>
+          </a:lnRef>
+          <a:fillRef idx="3">
+            <a:schemeClr val="accent1"/>
+          </a:fillRef>
+          <a:effectRef idx="2">
+            <a:schemeClr val="accent1"/>
+          </a:effectRef>
+          <a:fontRef idx="minor">
+            <a:schemeClr val="lt1"/>
+          </a:fontRef>
+        </p:style>
+        <p:txBody>
+          <a:bodyPr rtlCol="0" anchor="ctr"/>
+          <a:lstStyle/>
+          <a:p>
+            <a:pPr algn="ctr"/>
+          </a:p>
+        </p:txBody>
+      </p:sp>
+      <p:sp>
+        <p:nvSpPr>
+          <p:cNvPr id="13" name="TextBox 12"/>
+          <p:cNvSpPr txBox="1"/>
+          <p:nvPr/>
+        </p:nvSpPr>
+        <p:spPr>
+          <a:xfrm>
+            <a:off x="4306824" y="1719072"/>
+            <a:ext cx="3575304" cy="822960"/>
+          </a:xfrm>
+          <a:prstGeom prst="rect">
+            <a:avLst/>
+          </a:prstGeom>
+          <a:noFill/>
+        </p:spPr>
+        <p:txBody>
+          <a:bodyPr wrap="square" lIns="127000" rIns="127000" tIns="50800" bIns="50800">
+            <a:spAutoFit/>
+          </a:bodyPr>
+          <a:lstStyle/>
+          <a:p>
+            <a:pPr>
+              <a:defRPr sz="2100" b="1">
+                <a:solidFill>
+                  <a:srgbClr val="D97706"/>
+                </a:solidFill>
+                <a:latin typeface="Calibri"/>
+              </a:defRPr>
+            </a:pPr>
+            <a:r>
+              <a:t>232 Climate Records</a:t>
+            </a:r>
+          </a:p>
+          <a:p>
+            <a:pPr>
+              <a:spcBef>
+                <a:spcPts val="100"/>
+              </a:spcBef>
+              <a:defRPr sz="1000" b="1">
+                <a:solidFill>
+                  <a:srgbClr val="0F172A"/>
+                </a:solidFill>
+                <a:latin typeface="Calibri"/>
+              </a:defRPr>
+            </a:pPr>
+            <a:r>
+              <a:t>Monthly Regional Weather Observations</a:t>
+            </a:r>
+          </a:p>
+          <a:p>
+            <a:pPr>
+              <a:spcBef>
+                <a:spcPts val="100"/>
+              </a:spcBef>
+              <a:defRPr sz="850">
+                <a:solidFill>
+                  <a:srgbClr val="64748B"/>
+                </a:solidFill>
+                <a:latin typeface="Calibri"/>
+              </a:defRPr>
+            </a:pPr>
+            <a:r>
+              <a:t>2021–2024 Precipitation, Temperature Regimes &amp; Extreme Heat Days</a:t>
+            </a:r>
+          </a:p>
+        </p:txBody>
+      </p:sp>
+      <p:sp>
+        <p:nvSpPr>
+          <p:cNvPr id="14" name="Rounded Rectangle 13"/>
+          <p:cNvSpPr/>
+          <p:nvPr/>
+        </p:nvSpPr>
+        <p:spPr>
+          <a:xfrm>
+            <a:off x="8065008" y="1645920"/>
+            <a:ext cx="3575304" cy="914400"/>
+          </a:xfrm>
+          <a:prstGeom prst="roundRect">
+            <a:avLst/>
+          </a:prstGeom>
+          <a:solidFill>
+            <a:srgbClr val="FFFFFF"/>
+          </a:solidFill>
+          <a:ln w="12700">
+            <a:solidFill>
+              <a:srgbClr val="E2E8F0"/>
+            </a:solidFill>
+          </a:ln>
+        </p:spPr>
+        <p:style>
+          <a:lnRef idx="1">
+            <a:schemeClr val="accent1"/>
+          </a:lnRef>
+          <a:fillRef idx="3">
+            <a:schemeClr val="accent1"/>
+          </a:fillRef>
+          <a:effectRef idx="2">
+            <a:schemeClr val="accent1"/>
+          </a:effectRef>
+          <a:fontRef idx="minor">
+            <a:schemeClr val="lt1"/>
+          </a:fontRef>
+        </p:style>
+        <p:txBody>
+          <a:bodyPr rtlCol="0" anchor="ctr"/>
+          <a:lstStyle/>
+          <a:p>
+            <a:pPr algn="ctr"/>
+          </a:p>
+        </p:txBody>
+      </p:sp>
+      <p:sp>
+        <p:nvSpPr>
+          <p:cNvPr id="15" name="Rounded Rectangle 14"/>
+          <p:cNvSpPr/>
+          <p:nvPr/>
+        </p:nvSpPr>
+        <p:spPr>
+          <a:xfrm>
+            <a:off x="8065008" y="1645920"/>
+            <a:ext cx="3575304" cy="54864"/>
+          </a:xfrm>
+          <a:prstGeom prst="roundRect">
+            <a:avLst/>
+          </a:prstGeom>
+          <a:solidFill>
+            <a:srgbClr val="0369A1"/>
+          </a:solidFill>
+          <a:ln>
+            <a:noFill/>
+          </a:ln>
+        </p:spPr>
+        <p:style>
+          <a:lnRef idx="1">
+            <a:schemeClr val="accent1"/>
+          </a:lnRef>
+          <a:fillRef idx="3">
+            <a:schemeClr val="accent1"/>
+          </a:fillRef>
+          <a:effectRef idx="2">
+            <a:schemeClr val="accent1"/>
+          </a:effectRef>
+          <a:fontRef idx="minor">
+            <a:schemeClr val="lt1"/>
+          </a:fontRef>
+        </p:style>
+        <p:txBody>
+          <a:bodyPr rtlCol="0" anchor="ctr"/>
+          <a:lstStyle/>
+          <a:p>
+            <a:pPr algn="ctr"/>
+          </a:p>
+        </p:txBody>
+      </p:sp>
+      <p:sp>
+        <p:nvSpPr>
+          <p:cNvPr id="16" name="TextBox 15"/>
+          <p:cNvSpPr txBox="1"/>
+          <p:nvPr/>
+        </p:nvSpPr>
+        <p:spPr>
+          <a:xfrm>
+            <a:off x="8065008" y="1719072"/>
+            <a:ext cx="3575304" cy="822960"/>
+          </a:xfrm>
+          <a:prstGeom prst="rect">
+            <a:avLst/>
+          </a:prstGeom>
+          <a:noFill/>
+        </p:spPr>
+        <p:txBody>
+          <a:bodyPr wrap="square" lIns="127000" rIns="127000" tIns="50800" bIns="50800">
+            <a:spAutoFit/>
+          </a:bodyPr>
+          <a:lstStyle/>
+          <a:p>
+            <a:pPr>
+              <a:defRPr sz="2100" b="1">
+                <a:solidFill>
+                  <a:srgbClr val="0369A1"/>
+                </a:solidFill>
+                <a:latin typeface="Calibri"/>
+              </a:defRPr>
+            </a:pPr>
+            <a:r>
+              <a:t>100 Price Series</a:t>
+            </a:r>
+          </a:p>
+          <a:p>
+            <a:pPr>
+              <a:spcBef>
+                <a:spcPts val="100"/>
+              </a:spcBef>
+              <a:defRPr sz="1000" b="1">
+                <a:solidFill>
+                  <a:srgbClr val="0F172A"/>
+                </a:solidFill>
+                <a:latin typeface="Calibri"/>
+              </a:defRPr>
+            </a:pPr>
+            <a:r>
+              <a:t>Regional Commodity Market Benchmarks</a:t>
+            </a:r>
+          </a:p>
+          <a:p>
+            <a:pPr>
+              <a:spcBef>
+                <a:spcPts val="100"/>
+              </a:spcBef>
+              <a:defRPr sz="850">
+                <a:solidFill>
+                  <a:srgbClr val="64748B"/>
+                </a:solidFill>
+                <a:latin typeface="Calibri"/>
+              </a:defRPr>
+            </a:pPr>
+            <a:r>
+              <a:t>Birr/Quintal Standards Isolated Exclusively for Post-Hoc Revenue</a:t>
+            </a:r>
+          </a:p>
+        </p:txBody>
+      </p:sp>
+      <p:sp>
+        <p:nvSpPr>
+          <p:cNvPr id="17" name="Rounded Rectangle 16"/>
+          <p:cNvSpPr/>
+          <p:nvPr/>
+        </p:nvSpPr>
+        <p:spPr>
+          <a:xfrm>
+            <a:off x="548640" y="2724912"/>
+            <a:ext cx="3575304" cy="3547872"/>
+          </a:xfrm>
+          <a:prstGeom prst="roundRect">
+            <a:avLst/>
+          </a:prstGeom>
+          <a:solidFill>
+            <a:srgbClr val="FFFFFF"/>
+          </a:solidFill>
+          <a:ln w="12700">
+            <a:solidFill>
+              <a:srgbClr val="E2E8F0"/>
+            </a:solidFill>
+          </a:ln>
+        </p:spPr>
+        <p:style>
+          <a:lnRef idx="1">
+            <a:schemeClr val="accent1"/>
+          </a:lnRef>
+          <a:fillRef idx="3">
+            <a:schemeClr val="accent1"/>
+          </a:fillRef>
+          <a:effectRef idx="2">
+            <a:schemeClr val="accent1"/>
+          </a:effectRef>
+          <a:fontRef idx="minor">
+            <a:schemeClr val="lt1"/>
+          </a:fontRef>
+        </p:style>
+        <p:txBody>
+          <a:bodyPr rtlCol="0" anchor="ctr"/>
+          <a:lstStyle/>
+          <a:p>
+            <a:pPr algn="ctr"/>
+          </a:p>
+        </p:txBody>
+      </p:sp>
+      <p:sp>
+        <p:nvSpPr>
+          <p:cNvPr id="18" name="TextBox 17"/>
+          <p:cNvSpPr txBox="1"/>
+          <p:nvPr/>
+        </p:nvSpPr>
+        <p:spPr>
+          <a:xfrm>
+            <a:off x="685800" y="2834640"/>
+            <a:ext cx="3300984" cy="411480"/>
+          </a:xfrm>
+          <a:prstGeom prst="rect">
+            <a:avLst/>
+          </a:prstGeom>
+          <a:noFill/>
+        </p:spPr>
+        <p:txBody>
+          <a:bodyPr wrap="square" lIns="0" tIns="0">
+            <a:spAutoFit/>
+          </a:bodyPr>
+          <a:lstStyle/>
+          <a:p>
+            <a:pPr>
+              <a:defRPr sz="1300" b="1">
+                <a:solidFill>
+                  <a:srgbClr val="143D2B"/>
+                </a:solidFill>
+                <a:latin typeface="Calibri"/>
+              </a:defRPr>
+            </a:pPr>
+            <a:r>
+              <a:t>1. The Agronomic Challenge</a:t>
+            </a:r>
+          </a:p>
+        </p:txBody>
+      </p:sp>
+      <p:sp>
+        <p:nvSpPr>
+          <p:cNvPr id="19" name="TextBox 18"/>
+          <p:cNvSpPr txBox="1"/>
+          <p:nvPr/>
+        </p:nvSpPr>
+        <p:spPr>
+          <a:xfrm>
+            <a:off x="713232" y="3227832"/>
+            <a:ext cx="3246120" cy="2953512"/>
+          </a:xfrm>
+          <a:prstGeom prst="rect">
+            <a:avLst/>
+          </a:prstGeom>
+          <a:noFill/>
+        </p:spPr>
+        <p:txBody>
+          <a:bodyPr wrap="square">
+            <a:spAutoFit/>
+          </a:bodyPr>
+          <a:lstStyle/>
+          <a:p>
+            <a:pPr>
+              <a:spcBef>
+                <a:spcPts val="500"/>
+              </a:spcBef>
+              <a:defRPr sz="1000">
+                <a:latin typeface="Calibri"/>
+              </a:defRPr>
+            </a:pPr>
+            <a:r>
+              <a:rPr b="1">
+                <a:solidFill>
+                  <a:srgbClr val="15803D"/>
+                </a:solidFill>
+              </a:rPr>
+              <a:t>• </a:t>
+            </a:r>
+            <a:r>
+              <a:rPr b="1">
+                <a:solidFill>
+                  <a:srgbClr val="0F172A"/>
+                </a:solidFill>
+              </a:rPr>
+              <a:t>Pre-Harvest Forecast: </a:t>
+            </a:r>
+            <a:r>
+              <a:rPr b="0">
+                <a:solidFill>
+                  <a:srgbClr val="0F172A"/>
+                </a:solidFill>
+              </a:rPr>
+              <a:t>Accurately predict smallholder crop yield (yield_tons_per_ha) prior to harvest across five agro-ecological zones (Oromia, Amhara, SNNPR, Tigray, Somali).</a:t>
+            </a:r>
+          </a:p>
+          <a:p>
+            <a:pPr>
+              <a:spcBef>
+                <a:spcPts val="600"/>
+              </a:spcBef>
+              <a:defRPr sz="1000">
+                <a:latin typeface="Calibri"/>
+              </a:defRPr>
+            </a:pPr>
+            <a:r>
+              <a:rPr b="1">
+                <a:solidFill>
+                  <a:srgbClr val="15803D"/>
+                </a:solidFill>
+              </a:rPr>
+              <a:t>• </a:t>
+            </a:r>
+            <a:r>
+              <a:rPr b="1">
+                <a:solidFill>
+                  <a:srgbClr val="0F172A"/>
+                </a:solidFill>
+              </a:rPr>
+              <a:t>5 Target Crops: </a:t>
+            </a:r>
+            <a:r>
+              <a:rPr b="0">
+                <a:solidFill>
+                  <a:srgbClr val="0F172A"/>
+                </a:solidFill>
+              </a:rPr>
+              <a:t>Forecasts Teff, Wheat, Maize, Sorghum, and Barley across diverse elevation bands (400m to 3,600m).</a:t>
+            </a:r>
+          </a:p>
+          <a:p>
+            <a:pPr>
+              <a:spcBef>
+                <a:spcPts val="600"/>
+              </a:spcBef>
+              <a:defRPr sz="1000">
+                <a:latin typeface="Calibri"/>
+              </a:defRPr>
+            </a:pPr>
+            <a:r>
+              <a:rPr b="1">
+                <a:solidFill>
+                  <a:srgbClr val="15803D"/>
+                </a:solidFill>
+              </a:rPr>
+              <a:t>• </a:t>
+            </a:r>
+            <a:r>
+              <a:rPr b="1">
+                <a:solidFill>
+                  <a:srgbClr val="0F172A"/>
+                </a:solidFill>
+              </a:rPr>
+              <a:t>High Volatility: </a:t>
+            </a:r>
+            <a:r>
+              <a:rPr b="0">
+                <a:solidFill>
+                  <a:srgbClr val="0F172A"/>
+                </a:solidFill>
+              </a:rPr>
+              <a:t>Extreme seasonal rain anomalies and soil heterogeneity drive up to 4× yield dispersion between highland and lowland plots.</a:t>
+            </a:r>
+          </a:p>
+          <a:p>
+            <a:pPr>
+              <a:spcBef>
+                <a:spcPts val="600"/>
+              </a:spcBef>
+              <a:defRPr sz="1000">
+                <a:latin typeface="Calibri"/>
+              </a:defRPr>
+            </a:pPr>
+            <a:r>
+              <a:rPr b="1">
+                <a:solidFill>
+                  <a:srgbClr val="15803D"/>
+                </a:solidFill>
+              </a:rPr>
+              <a:t>• </a:t>
+            </a:r>
+            <a:r>
+              <a:rPr b="1">
+                <a:solidFill>
+                  <a:srgbClr val="0F172A"/>
+                </a:solidFill>
+              </a:rPr>
+              <a:t>End-to-End System: </a:t>
+            </a:r>
+            <a:r>
+              <a:rPr b="0">
+                <a:solidFill>
+                  <a:srgbClr val="0F172A"/>
+                </a:solidFill>
+              </a:rPr>
+              <a:t>Engineered from raw tri-dataset ingestion into AgriYield™ Pro Enterprise—delivering live decision support across 4 dedicated workspaces.</a:t>
+            </a:r>
+          </a:p>
+        </p:txBody>
+      </p:sp>
+      <p:sp>
+        <p:nvSpPr>
+          <p:cNvPr id="20" name="Rounded Rectangle 19"/>
+          <p:cNvSpPr/>
+          <p:nvPr/>
+        </p:nvSpPr>
+        <p:spPr>
+          <a:xfrm>
+            <a:off x="4306824" y="2724912"/>
+            <a:ext cx="3575304" cy="3547872"/>
+          </a:xfrm>
+          <a:prstGeom prst="roundRect">
+            <a:avLst/>
+          </a:prstGeom>
+          <a:solidFill>
+            <a:srgbClr val="FFFFFF"/>
+          </a:solidFill>
+          <a:ln w="12700">
+            <a:solidFill>
+              <a:srgbClr val="E2E8F0"/>
+            </a:solidFill>
+          </a:ln>
+        </p:spPr>
+        <p:style>
+          <a:lnRef idx="1">
+            <a:schemeClr val="accent1"/>
+          </a:lnRef>
+          <a:fillRef idx="3">
+            <a:schemeClr val="accent1"/>
+          </a:fillRef>
+          <a:effectRef idx="2">
+            <a:schemeClr val="accent1"/>
+          </a:effectRef>
+          <a:fontRef idx="minor">
+            <a:schemeClr val="lt1"/>
+          </a:fontRef>
+        </p:style>
+        <p:txBody>
+          <a:bodyPr rtlCol="0" anchor="ctr"/>
+          <a:lstStyle/>
+          <a:p>
+            <a:pPr algn="ctr"/>
+          </a:p>
+        </p:txBody>
+      </p:sp>
+      <p:sp>
+        <p:nvSpPr>
+          <p:cNvPr id="21" name="TextBox 20"/>
+          <p:cNvSpPr txBox="1"/>
+          <p:nvPr/>
+        </p:nvSpPr>
+        <p:spPr>
+          <a:xfrm>
+            <a:off x="4443984" y="2834640"/>
+            <a:ext cx="3300984" cy="411480"/>
+          </a:xfrm>
+          <a:prstGeom prst="rect">
+            <a:avLst/>
+          </a:prstGeom>
+          <a:noFill/>
+        </p:spPr>
+        <p:txBody>
+          <a:bodyPr wrap="square" lIns="0" tIns="0">
+            <a:spAutoFit/>
+          </a:bodyPr>
+          <a:lstStyle/>
+          <a:p>
+            <a:pPr>
+              <a:defRPr sz="1300" b="1">
+                <a:solidFill>
+                  <a:srgbClr val="143D2B"/>
+                </a:solidFill>
+                <a:latin typeface="Calibri"/>
+              </a:defRPr>
+            </a:pPr>
+            <a:r>
+              <a:t>2. Tri-Dataset Ecosystem</a:t>
+            </a:r>
+          </a:p>
+        </p:txBody>
+      </p:sp>
+      <p:sp>
+        <p:nvSpPr>
+          <p:cNvPr id="22" name="TextBox 21"/>
+          <p:cNvSpPr txBox="1"/>
+          <p:nvPr/>
+        </p:nvSpPr>
+        <p:spPr>
+          <a:xfrm>
+            <a:off x="4471416" y="3227832"/>
+            <a:ext cx="3246120" cy="2953512"/>
+          </a:xfrm>
+          <a:prstGeom prst="rect">
+            <a:avLst/>
+          </a:prstGeom>
+          <a:noFill/>
+        </p:spPr>
+        <p:txBody>
+          <a:bodyPr wrap="square">
+            <a:spAutoFit/>
+          </a:bodyPr>
+          <a:lstStyle/>
+          <a:p>
+            <a:pPr>
+              <a:spcBef>
+                <a:spcPts val="500"/>
+              </a:spcBef>
+              <a:defRPr sz="1000">
+                <a:latin typeface="Calibri"/>
+              </a:defRPr>
+            </a:pPr>
+            <a:r>
+              <a:rPr b="1">
+                <a:solidFill>
+                  <a:srgbClr val="15803D"/>
+                </a:solidFill>
+              </a:rPr>
+              <a:t>• </a:t>
+            </a:r>
+            <a:r>
+              <a:rPr b="1">
+                <a:solidFill>
+                  <a:srgbClr val="0F172A"/>
+                </a:solidFill>
+              </a:rPr>
+              <a:t>Plot Surveys (15,090): </a:t>
+            </a:r>
+            <a:r>
+              <a:rPr b="0">
+                <a:solidFill>
+                  <a:srgbClr val="0F172A"/>
+                </a:solidFill>
+              </a:rPr>
+              <a:t>Granular plot records containing farm size, fertilizer inputs, improved seed usage, elevation, pest flags, and self-reported rain.</a:t>
+            </a:r>
+          </a:p>
+          <a:p>
+            <a:pPr>
+              <a:spcBef>
+                <a:spcPts val="600"/>
+              </a:spcBef>
+              <a:defRPr sz="1000">
+                <a:latin typeface="Calibri"/>
+              </a:defRPr>
+            </a:pPr>
+            <a:r>
+              <a:rPr b="1">
+                <a:solidFill>
+                  <a:srgbClr val="15803D"/>
+                </a:solidFill>
+              </a:rPr>
+              <a:t>• </a:t>
+            </a:r>
+            <a:r>
+              <a:rPr b="1">
+                <a:solidFill>
+                  <a:srgbClr val="0F172A"/>
+                </a:solidFill>
+              </a:rPr>
+              <a:t>Climate Stations (232): </a:t>
+            </a:r>
+            <a:r>
+              <a:rPr b="0">
+                <a:solidFill>
+                  <a:srgbClr val="0F172A"/>
+                </a:solidFill>
+              </a:rPr>
+              <a:t>Monthly weather metrics with messy station codes ('AMH', 'ORO') and duplicate sensor timestamps.</a:t>
+            </a:r>
+          </a:p>
+          <a:p>
+            <a:pPr>
+              <a:spcBef>
+                <a:spcPts val="600"/>
+              </a:spcBef>
+              <a:defRPr sz="1000">
+                <a:latin typeface="Calibri"/>
+              </a:defRPr>
+            </a:pPr>
+            <a:r>
+              <a:rPr b="1">
+                <a:solidFill>
+                  <a:srgbClr val="15803D"/>
+                </a:solidFill>
+              </a:rPr>
+              <a:t>• </a:t>
+            </a:r>
+            <a:r>
+              <a:rPr b="1">
+                <a:solidFill>
+                  <a:srgbClr val="0F172A"/>
+                </a:solidFill>
+              </a:rPr>
+              <a:t>Market Prices (100): </a:t>
+            </a:r>
+            <a:r>
+              <a:rPr b="0">
+                <a:solidFill>
+                  <a:srgbClr val="0F172A"/>
+                </a:solidFill>
+              </a:rPr>
+              <a:t>Farmgate commodity market prices distorted by 100× unit mix-ups (Birr/kg vs. Birr/quintal).</a:t>
+            </a:r>
+          </a:p>
+          <a:p>
+            <a:pPr>
+              <a:spcBef>
+                <a:spcPts val="600"/>
+              </a:spcBef>
+              <a:defRPr sz="1000">
+                <a:latin typeface="Calibri"/>
+              </a:defRPr>
+            </a:pPr>
+            <a:r>
+              <a:rPr b="1">
+                <a:solidFill>
+                  <a:srgbClr val="15803D"/>
+                </a:solidFill>
+              </a:rPr>
+              <a:t>• </a:t>
+            </a:r>
+            <a:r>
+              <a:rPr b="1">
+                <a:solidFill>
+                  <a:srgbClr val="0F172A"/>
+                </a:solidFill>
+              </a:rPr>
+              <a:t>Evaluation Set (3,750): </a:t>
+            </a:r>
+            <a:r>
+              <a:rPr b="0">
+                <a:solidFill>
+                  <a:srgbClr val="0F172A"/>
+                </a:solidFill>
+              </a:rPr>
+              <a:t>Blind leaderboard test set evaluated strictly against ground truth with zero data leakage.</a:t>
+            </a:r>
+          </a:p>
+        </p:txBody>
+      </p:sp>
+      <p:sp>
+        <p:nvSpPr>
+          <p:cNvPr id="23" name="Rounded Rectangle 22"/>
+          <p:cNvSpPr/>
+          <p:nvPr/>
+        </p:nvSpPr>
+        <p:spPr>
+          <a:xfrm>
+            <a:off x="8065008" y="2724912"/>
+            <a:ext cx="3575304" cy="3547872"/>
+          </a:xfrm>
+          <a:prstGeom prst="roundRect">
+            <a:avLst/>
+          </a:prstGeom>
+          <a:solidFill>
+            <a:srgbClr val="FFFFFF"/>
+          </a:solidFill>
+          <a:ln w="12700">
+            <a:solidFill>
+              <a:srgbClr val="E2E8F0"/>
+            </a:solidFill>
+          </a:ln>
+        </p:spPr>
+        <p:style>
+          <a:lnRef idx="1">
+            <a:schemeClr val="accent1"/>
+          </a:lnRef>
+          <a:fillRef idx="3">
+            <a:schemeClr val="accent1"/>
+          </a:fillRef>
+          <a:effectRef idx="2">
+            <a:schemeClr val="accent1"/>
+          </a:effectRef>
+          <a:fontRef idx="minor">
+            <a:schemeClr val="lt1"/>
+          </a:fontRef>
+        </p:style>
+        <p:txBody>
+          <a:bodyPr rtlCol="0" anchor="ctr"/>
+          <a:lstStyle/>
+          <a:p>
+            <a:pPr algn="ctr"/>
+          </a:p>
+        </p:txBody>
+      </p:sp>
+      <p:sp>
+        <p:nvSpPr>
+          <p:cNvPr id="24" name="TextBox 23"/>
+          <p:cNvSpPr txBox="1"/>
+          <p:nvPr/>
+        </p:nvSpPr>
+        <p:spPr>
+          <a:xfrm>
+            <a:off x="8202168" y="2834640"/>
+            <a:ext cx="3300984" cy="411480"/>
+          </a:xfrm>
+          <a:prstGeom prst="rect">
+            <a:avLst/>
+          </a:prstGeom>
+          <a:noFill/>
+        </p:spPr>
+        <p:txBody>
+          <a:bodyPr wrap="square" lIns="0" tIns="0">
+            <a:spAutoFit/>
+          </a:bodyPr>
+          <a:lstStyle/>
+          <a:p>
+            <a:pPr>
+              <a:defRPr sz="1300" b="1">
+                <a:solidFill>
+                  <a:srgbClr val="143D2B"/>
+                </a:solidFill>
+                <a:latin typeface="Calibri"/>
+              </a:defRPr>
+            </a:pPr>
+            <a:r>
+              <a:t>3. Strict Competition Hygiene</a:t>
+            </a:r>
+          </a:p>
+        </p:txBody>
+      </p:sp>
+      <p:sp>
+        <p:nvSpPr>
+          <p:cNvPr id="25" name="TextBox 24"/>
+          <p:cNvSpPr txBox="1"/>
+          <p:nvPr/>
+        </p:nvSpPr>
+        <p:spPr>
+          <a:xfrm>
+            <a:off x="8229600" y="3227832"/>
+            <a:ext cx="3246120" cy="2953512"/>
+          </a:xfrm>
+          <a:prstGeom prst="rect">
+            <a:avLst/>
+          </a:prstGeom>
+          <a:noFill/>
+        </p:spPr>
+        <p:txBody>
+          <a:bodyPr wrap="square">
+            <a:spAutoFit/>
+          </a:bodyPr>
+          <a:lstStyle/>
+          <a:p>
+            <a:pPr>
+              <a:spcBef>
+                <a:spcPts val="500"/>
+              </a:spcBef>
+              <a:defRPr sz="1000">
+                <a:latin typeface="Calibri"/>
+              </a:defRPr>
+            </a:pPr>
+            <a:r>
+              <a:rPr b="1">
+                <a:solidFill>
+                  <a:srgbClr val="15803D"/>
+                </a:solidFill>
+              </a:rPr>
+              <a:t>• </a:t>
+            </a:r>
+            <a:r>
+              <a:rPr b="1">
+                <a:solidFill>
+                  <a:srgbClr val="0F172A"/>
+                </a:solidFill>
+              </a:rPr>
+              <a:t>Regression Formulation: </a:t>
+            </a:r>
+            <a:r>
+              <a:rPr b="0">
+                <a:solidFill>
+                  <a:srgbClr val="0F172A"/>
+                </a:solidFill>
+              </a:rPr>
+              <a:t>Continuous supervised regression strictly evaluated on RMSE (primary metric), MAE, and R².</a:t>
+            </a:r>
+          </a:p>
+          <a:p>
+            <a:pPr>
+              <a:spcBef>
+                <a:spcPts val="600"/>
+              </a:spcBef>
+              <a:defRPr sz="1000">
+                <a:latin typeface="Calibri"/>
+              </a:defRPr>
+            </a:pPr>
+            <a:r>
+              <a:rPr b="1">
+                <a:solidFill>
+                  <a:srgbClr val="15803D"/>
+                </a:solidFill>
+              </a:rPr>
+              <a:t>• </a:t>
+            </a:r>
+            <a:r>
+              <a:rPr b="1">
+                <a:solidFill>
+                  <a:srgbClr val="0F172A"/>
+                </a:solidFill>
+              </a:rPr>
+              <a:t>Zero Leakage (Rule 6): </a:t>
+            </a:r>
+            <a:r>
+              <a:rPr b="0">
+                <a:solidFill>
+                  <a:srgbClr val="0F172A"/>
+                </a:solidFill>
+              </a:rPr>
+              <a:t>Imputations, encoders, and scalers fitted strictly on training subsets; zero test data peeked.</a:t>
+            </a:r>
+          </a:p>
+          <a:p>
+            <a:pPr>
+              <a:spcBef>
+                <a:spcPts val="600"/>
+              </a:spcBef>
+              <a:defRPr sz="1000">
+                <a:latin typeface="Calibri"/>
+              </a:defRPr>
+            </a:pPr>
+            <a:r>
+              <a:rPr b="1">
+                <a:solidFill>
+                  <a:srgbClr val="15803D"/>
+                </a:solidFill>
+              </a:rPr>
+              <a:t>• </a:t>
+            </a:r>
+            <a:r>
+              <a:rPr b="1">
+                <a:solidFill>
+                  <a:srgbClr val="0F172A"/>
+                </a:solidFill>
+              </a:rPr>
+              <a:t>Price Isolation (Rule 5): </a:t>
+            </a:r>
+            <a:r>
+              <a:rPr b="0">
+                <a:solidFill>
+                  <a:srgbClr val="0F172A"/>
+                </a:solidFill>
+              </a:rPr>
+              <a:t>Market prices completely excluded from feature engineering; used strictly for downstream farmer revenue analysis.</a:t>
+            </a:r>
+          </a:p>
+          <a:p>
+            <a:pPr>
+              <a:spcBef>
+                <a:spcPts val="600"/>
+              </a:spcBef>
+              <a:defRPr sz="1000">
+                <a:latin typeface="Calibri"/>
+              </a:defRPr>
+            </a:pPr>
+            <a:r>
+              <a:rPr b="1">
+                <a:solidFill>
+                  <a:srgbClr val="15803D"/>
+                </a:solidFill>
+              </a:rPr>
+              <a:t>• </a:t>
+            </a:r>
+            <a:r>
+              <a:rPr b="1">
+                <a:solidFill>
+                  <a:srgbClr val="0F172A"/>
+                </a:solidFill>
+              </a:rPr>
+              <a:t>Weather Integration: </a:t>
+            </a:r>
+            <a:r>
+              <a:rPr b="0">
+                <a:solidFill>
+                  <a:srgbClr val="0F172A"/>
+                </a:solidFill>
+              </a:rPr>
+              <a:t>Pre-harvest seasonal climate signals seamlessly aggregated and mandated in final models.</a:t>
             </a:r>
           </a:p>
         </p:txBody>
@@ -3187,14 +4565,112 @@
       <p:grpSpPr/>
       <p:sp>
         <p:nvSpPr>
-          <p:cNvPr id="2" name="TextBox 1"/>
+          <p:cNvPr id="2" name="Rectangle 1"/>
+          <p:cNvSpPr/>
+          <p:nvPr/>
+        </p:nvSpPr>
+        <p:spPr>
+          <a:xfrm>
+            <a:off x="0" y="0"/>
+            <a:ext cx="12191695" cy="6858000"/>
+          </a:xfrm>
+          <a:prstGeom prst="rect">
+            <a:avLst/>
+          </a:prstGeom>
+          <a:solidFill>
+            <a:srgbClr val="FAF9F5"/>
+          </a:solidFill>
+          <a:ln>
+            <a:noFill/>
+          </a:ln>
+        </p:spPr>
+        <p:style>
+          <a:lnRef idx="1">
+            <a:schemeClr val="accent1"/>
+          </a:lnRef>
+          <a:fillRef idx="3">
+            <a:schemeClr val="accent1"/>
+          </a:fillRef>
+          <a:effectRef idx="2">
+            <a:schemeClr val="accent1"/>
+          </a:effectRef>
+          <a:fontRef idx="minor">
+            <a:schemeClr val="lt1"/>
+          </a:fontRef>
+        </p:style>
+        <p:txBody>
+          <a:bodyPr rtlCol="0" anchor="ctr"/>
+          <a:lstStyle/>
+          <a:p>
+            <a:pPr algn="ctr"/>
+          </a:p>
+        </p:txBody>
+      </p:sp>
+      <p:sp>
+        <p:nvSpPr>
+          <p:cNvPr id="3" name="Rounded Rectangle 2"/>
+          <p:cNvSpPr/>
+          <p:nvPr/>
+        </p:nvSpPr>
+        <p:spPr>
+          <a:xfrm>
+            <a:off x="548640" y="384048"/>
+            <a:ext cx="4727448" cy="292608"/>
+          </a:xfrm>
+          <a:prstGeom prst="roundRect">
+            <a:avLst/>
+          </a:prstGeom>
+          <a:solidFill>
+            <a:srgbClr val="ECFDF5"/>
+          </a:solidFill>
+          <a:ln w="12700">
+            <a:solidFill>
+              <a:srgbClr val="065F46"/>
+            </a:solidFill>
+          </a:ln>
+        </p:spPr>
+        <p:style>
+          <a:lnRef idx="1">
+            <a:schemeClr val="accent1"/>
+          </a:lnRef>
+          <a:fillRef idx="3">
+            <a:schemeClr val="accent1"/>
+          </a:fillRef>
+          <a:effectRef idx="2">
+            <a:schemeClr val="accent1"/>
+          </a:effectRef>
+          <a:fontRef idx="minor">
+            <a:schemeClr val="lt1"/>
+          </a:fontRef>
+        </p:style>
+        <p:txBody>
+          <a:bodyPr rtlCol="0" anchor="ctr" wrap="none" tIns="25400" bIns="25400" lIns="101600" rIns="101600"/>
+          <a:lstStyle/>
+          <a:p>
+            <a:pPr algn="ctr">
+              <a:defRPr sz="950" b="1">
+                <a:solidFill>
+                  <a:srgbClr val="065F46"/>
+                </a:solidFill>
+                <a:latin typeface="Calibri"/>
+              </a:defRPr>
+            </a:pPr>
+            <a:r>
+              <a:t>DELIVERABLE A | DATA ENGINEERING &amp; ARCHITECTURE</a:t>
+            </a:r>
+          </a:p>
+        </p:txBody>
+      </p:sp>
+      <p:sp>
+        <p:nvSpPr>
+          <p:cNvPr id="4" name="TextBox 3"/>
           <p:cNvSpPr txBox="1"/>
           <p:nvPr/>
         </p:nvSpPr>
         <p:spPr>
           <a:xfrm>
-            <a:off x="731520" y="548640"/>
-            <a:ext cx="10698480" cy="1097280"/>
+            <a:off x="548640" y="713232"/>
+            <a:ext cx="11091672" cy="868680"/>
           </a:xfrm>
           <a:prstGeom prst="rect">
             <a:avLst/>
@@ -3202,30 +4678,94 @@
           <a:noFill/>
         </p:spPr>
         <p:txBody>
-          <a:bodyPr wrap="none">
+          <a:bodyPr wrap="square" lIns="0" rIns="0" tIns="0" bIns="0">
             <a:spAutoFit/>
           </a:bodyPr>
           <a:lstStyle/>
           <a:p>
             <a:pPr>
-              <a:defRPr sz="2800" b="1"/>
-            </a:pPr>
-            <a:r>
-              <a:t>Data Cleaning and Integration Pipeline</a:t>
-            </a:r>
-          </a:p>
-        </p:txBody>
-      </p:sp>
-      <p:sp>
-        <p:nvSpPr>
-          <p:cNvPr id="3" name="TextBox 2"/>
+              <a:defRPr sz="2100" b="1">
+                <a:solidFill>
+                  <a:srgbClr val="143D2B"/>
+                </a:solidFill>
+                <a:latin typeface="Calibri"/>
+              </a:defRPr>
+            </a:pPr>
+            <a:r>
+              <a:t>Pipeline Architecture: Cleaning &amp; Spatio-Temporal Join</a:t>
+            </a:r>
+          </a:p>
+          <a:p>
+            <a:pPr>
+              <a:spcBef>
+                <a:spcPts val="200"/>
+              </a:spcBef>
+              <a:defRPr sz="1150">
+                <a:solidFill>
+                  <a:srgbClr val="64748B"/>
+                </a:solidFill>
+                <a:latin typeface="Calibri"/>
+              </a:defRPr>
+            </a:pPr>
+            <a:r>
+              <a:t>Automated Key Harmonization, 4-Month Dynamic Climate Windows, and Micro-Climate Feature Engineering</a:t>
+            </a:r>
+          </a:p>
+        </p:txBody>
+      </p:sp>
+      <p:sp>
+        <p:nvSpPr>
+          <p:cNvPr id="5" name="Rectangle 4"/>
+          <p:cNvSpPr/>
+          <p:nvPr/>
+        </p:nvSpPr>
+        <p:spPr>
+          <a:xfrm>
+            <a:off x="548640" y="6419088"/>
+            <a:ext cx="11091672" cy="13716"/>
+          </a:xfrm>
+          <a:prstGeom prst="rect">
+            <a:avLst/>
+          </a:prstGeom>
+          <a:solidFill>
+            <a:srgbClr val="E2E8F0"/>
+          </a:solidFill>
+          <a:ln>
+            <a:noFill/>
+          </a:ln>
+        </p:spPr>
+        <p:style>
+          <a:lnRef idx="1">
+            <a:schemeClr val="accent1"/>
+          </a:lnRef>
+          <a:fillRef idx="3">
+            <a:schemeClr val="accent1"/>
+          </a:fillRef>
+          <a:effectRef idx="2">
+            <a:schemeClr val="accent1"/>
+          </a:effectRef>
+          <a:fontRef idx="minor">
+            <a:schemeClr val="lt1"/>
+          </a:fontRef>
+        </p:style>
+        <p:txBody>
+          <a:bodyPr rtlCol="0" anchor="ctr"/>
+          <a:lstStyle/>
+          <a:p>
+            <a:pPr algn="ctr"/>
+          </a:p>
+        </p:txBody>
+      </p:sp>
+      <p:sp>
+        <p:nvSpPr>
+          <p:cNvPr id="6" name="TextBox 5"/>
           <p:cNvSpPr txBox="1"/>
           <p:nvPr/>
         </p:nvSpPr>
         <p:spPr>
           <a:xfrm>
-            <a:off x="731520" y="1645920"/>
-            <a:ext cx="10698480" cy="4572000"/>
+            <a:off x="548640" y="6455664"/>
+            <a:ext cx="7772400" cy="320040"/>
           </a:xfrm>
           <a:prstGeom prst="rect">
             <a:avLst/>
@@ -3233,29 +4773,1263 @@
           <a:noFill/>
         </p:spPr>
         <p:txBody>
-          <a:bodyPr wrap="none">
+          <a:bodyPr wrap="none" lIns="0" tIns="0">
             <a:spAutoFit/>
           </a:bodyPr>
           <a:lstStyle/>
           <a:p>
             <a:pPr>
-              <a:defRPr sz="1800"/>
-            </a:pPr>
-            <a:r>
-              <a:t>Slide 2: Deliverable A — Key Methods and Integrity</a:t>
-            </a:r>
-            <a:br/>
-            <a:br/>
-            <a:r>
-              <a:t>- Label Standardization: Fixed inconsistencies in regions and crops</a:t>
-            </a:r>
-            <a:br/>
-            <a:r>
-              <a:t>- Weather Join: 3-month growing season window aggregation</a:t>
-            </a:r>
-            <a:br/>
-            <a:r>
-              <a:t>- Quality Control: 5 automated assertion checks with zero test leakage</a:t>
+              <a:defRPr sz="900">
+                <a:solidFill>
+                  <a:srgbClr val="64748B"/>
+                </a:solidFill>
+                <a:latin typeface="Calibri"/>
+              </a:defRPr>
+            </a:pPr>
+            <a:r>
+              <a:t>Team 11 | Ethiopian Smallholder Crop-Yield Challenge | AAU AI Hackathon 2026</a:t>
+            </a:r>
+          </a:p>
+        </p:txBody>
+      </p:sp>
+      <p:sp>
+        <p:nvSpPr>
+          <p:cNvPr id="7" name="TextBox 6"/>
+          <p:cNvSpPr txBox="1"/>
+          <p:nvPr/>
+        </p:nvSpPr>
+        <p:spPr>
+          <a:xfrm>
+            <a:off x="9811512" y="6455664"/>
+            <a:ext cx="1828800" cy="320040"/>
+          </a:xfrm>
+          <a:prstGeom prst="rect">
+            <a:avLst/>
+          </a:prstGeom>
+          <a:noFill/>
+        </p:spPr>
+        <p:txBody>
+          <a:bodyPr wrap="none" rIns="0" tIns="0">
+            <a:spAutoFit/>
+          </a:bodyPr>
+          <a:lstStyle/>
+          <a:p>
+            <a:pPr algn="r">
+              <a:defRPr sz="900" b="1">
+                <a:solidFill>
+                  <a:srgbClr val="143D2B"/>
+                </a:solidFill>
+                <a:latin typeface="Calibri"/>
+              </a:defRPr>
+            </a:pPr>
+            <a:r>
+              <a:t>Slide 2 of 5</a:t>
+            </a:r>
+          </a:p>
+        </p:txBody>
+      </p:sp>
+      <p:sp>
+        <p:nvSpPr>
+          <p:cNvPr id="8" name="Rounded Rectangle 7"/>
+          <p:cNvSpPr/>
+          <p:nvPr/>
+        </p:nvSpPr>
+        <p:spPr>
+          <a:xfrm>
+            <a:off x="548640" y="1645920"/>
+            <a:ext cx="2633472" cy="841248"/>
+          </a:xfrm>
+          <a:prstGeom prst="roundRect">
+            <a:avLst/>
+          </a:prstGeom>
+          <a:solidFill>
+            <a:srgbClr val="FFFFFF"/>
+          </a:solidFill>
+          <a:ln w="12700">
+            <a:solidFill>
+              <a:srgbClr val="E2E8F0"/>
+            </a:solidFill>
+          </a:ln>
+        </p:spPr>
+        <p:style>
+          <a:lnRef idx="1">
+            <a:schemeClr val="accent1"/>
+          </a:lnRef>
+          <a:fillRef idx="3">
+            <a:schemeClr val="accent1"/>
+          </a:fillRef>
+          <a:effectRef idx="2">
+            <a:schemeClr val="accent1"/>
+          </a:effectRef>
+          <a:fontRef idx="minor">
+            <a:schemeClr val="lt1"/>
+          </a:fontRef>
+        </p:style>
+        <p:txBody>
+          <a:bodyPr rtlCol="0" anchor="ctr"/>
+          <a:lstStyle/>
+          <a:p>
+            <a:pPr algn="ctr"/>
+          </a:p>
+        </p:txBody>
+      </p:sp>
+      <p:sp>
+        <p:nvSpPr>
+          <p:cNvPr id="9" name="Rounded Rectangle 8"/>
+          <p:cNvSpPr/>
+          <p:nvPr/>
+        </p:nvSpPr>
+        <p:spPr>
+          <a:xfrm>
+            <a:off x="548640" y="1645920"/>
+            <a:ext cx="2633472" cy="54864"/>
+          </a:xfrm>
+          <a:prstGeom prst="roundRect">
+            <a:avLst/>
+          </a:prstGeom>
+          <a:solidFill>
+            <a:srgbClr val="15803D"/>
+          </a:solidFill>
+          <a:ln>
+            <a:noFill/>
+          </a:ln>
+        </p:spPr>
+        <p:style>
+          <a:lnRef idx="1">
+            <a:schemeClr val="accent1"/>
+          </a:lnRef>
+          <a:fillRef idx="3">
+            <a:schemeClr val="accent1"/>
+          </a:fillRef>
+          <a:effectRef idx="2">
+            <a:schemeClr val="accent1"/>
+          </a:effectRef>
+          <a:fontRef idx="minor">
+            <a:schemeClr val="lt1"/>
+          </a:fontRef>
+        </p:style>
+        <p:txBody>
+          <a:bodyPr rtlCol="0" anchor="ctr"/>
+          <a:lstStyle/>
+          <a:p>
+            <a:pPr algn="ctr"/>
+          </a:p>
+        </p:txBody>
+      </p:sp>
+      <p:sp>
+        <p:nvSpPr>
+          <p:cNvPr id="10" name="TextBox 9"/>
+          <p:cNvSpPr txBox="1"/>
+          <p:nvPr/>
+        </p:nvSpPr>
+        <p:spPr>
+          <a:xfrm>
+            <a:off x="548640" y="1719072"/>
+            <a:ext cx="2633472" cy="749808"/>
+          </a:xfrm>
+          <a:prstGeom prst="rect">
+            <a:avLst/>
+          </a:prstGeom>
+          <a:noFill/>
+        </p:spPr>
+        <p:txBody>
+          <a:bodyPr wrap="square" lIns="127000" rIns="127000" tIns="50800" bIns="50800">
+            <a:spAutoFit/>
+          </a:bodyPr>
+          <a:lstStyle/>
+          <a:p>
+            <a:pPr>
+              <a:defRPr sz="2100" b="1">
+                <a:solidFill>
+                  <a:srgbClr val="15803D"/>
+                </a:solidFill>
+                <a:latin typeface="Calibri"/>
+              </a:defRPr>
+            </a:pPr>
+            <a:r>
+              <a:t>100.0%</a:t>
+            </a:r>
+          </a:p>
+          <a:p>
+            <a:pPr>
+              <a:spcBef>
+                <a:spcPts val="100"/>
+              </a:spcBef>
+              <a:defRPr sz="1000" b="1">
+                <a:solidFill>
+                  <a:srgbClr val="0F172A"/>
+                </a:solidFill>
+                <a:latin typeface="Calibri"/>
+              </a:defRPr>
+            </a:pPr>
+            <a:r>
+              <a:t>Plot → Weather Match Rate</a:t>
+            </a:r>
+          </a:p>
+          <a:p>
+            <a:pPr>
+              <a:spcBef>
+                <a:spcPts val="100"/>
+              </a:spcBef>
+              <a:defRPr sz="850">
+                <a:solidFill>
+                  <a:srgbClr val="64748B"/>
+                </a:solidFill>
+                <a:latin typeface="Calibri"/>
+              </a:defRPr>
+            </a:pPr>
+            <a:r>
+              <a:t>0 Unmatched Plots (N:1 Join)</a:t>
+            </a:r>
+          </a:p>
+        </p:txBody>
+      </p:sp>
+      <p:sp>
+        <p:nvSpPr>
+          <p:cNvPr id="11" name="Rounded Rectangle 10"/>
+          <p:cNvSpPr/>
+          <p:nvPr/>
+        </p:nvSpPr>
+        <p:spPr>
+          <a:xfrm>
+            <a:off x="3364992" y="1645920"/>
+            <a:ext cx="2633472" cy="841248"/>
+          </a:xfrm>
+          <a:prstGeom prst="roundRect">
+            <a:avLst/>
+          </a:prstGeom>
+          <a:solidFill>
+            <a:srgbClr val="FFFFFF"/>
+          </a:solidFill>
+          <a:ln w="12700">
+            <a:solidFill>
+              <a:srgbClr val="E2E8F0"/>
+            </a:solidFill>
+          </a:ln>
+        </p:spPr>
+        <p:style>
+          <a:lnRef idx="1">
+            <a:schemeClr val="accent1"/>
+          </a:lnRef>
+          <a:fillRef idx="3">
+            <a:schemeClr val="accent1"/>
+          </a:fillRef>
+          <a:effectRef idx="2">
+            <a:schemeClr val="accent1"/>
+          </a:effectRef>
+          <a:fontRef idx="minor">
+            <a:schemeClr val="lt1"/>
+          </a:fontRef>
+        </p:style>
+        <p:txBody>
+          <a:bodyPr rtlCol="0" anchor="ctr"/>
+          <a:lstStyle/>
+          <a:p>
+            <a:pPr algn="ctr"/>
+          </a:p>
+        </p:txBody>
+      </p:sp>
+      <p:sp>
+        <p:nvSpPr>
+          <p:cNvPr id="12" name="Rounded Rectangle 11"/>
+          <p:cNvSpPr/>
+          <p:nvPr/>
+        </p:nvSpPr>
+        <p:spPr>
+          <a:xfrm>
+            <a:off x="3364992" y="1645920"/>
+            <a:ext cx="2633472" cy="54864"/>
+          </a:xfrm>
+          <a:prstGeom prst="roundRect">
+            <a:avLst/>
+          </a:prstGeom>
+          <a:solidFill>
+            <a:srgbClr val="15803D"/>
+          </a:solidFill>
+          <a:ln>
+            <a:noFill/>
+          </a:ln>
+        </p:spPr>
+        <p:style>
+          <a:lnRef idx="1">
+            <a:schemeClr val="accent1"/>
+          </a:lnRef>
+          <a:fillRef idx="3">
+            <a:schemeClr val="accent1"/>
+          </a:fillRef>
+          <a:effectRef idx="2">
+            <a:schemeClr val="accent1"/>
+          </a:effectRef>
+          <a:fontRef idx="minor">
+            <a:schemeClr val="lt1"/>
+          </a:fontRef>
+        </p:style>
+        <p:txBody>
+          <a:bodyPr rtlCol="0" anchor="ctr"/>
+          <a:lstStyle/>
+          <a:p>
+            <a:pPr algn="ctr"/>
+          </a:p>
+        </p:txBody>
+      </p:sp>
+      <p:sp>
+        <p:nvSpPr>
+          <p:cNvPr id="13" name="TextBox 12"/>
+          <p:cNvSpPr txBox="1"/>
+          <p:nvPr/>
+        </p:nvSpPr>
+        <p:spPr>
+          <a:xfrm>
+            <a:off x="3364992" y="1719072"/>
+            <a:ext cx="2633472" cy="749808"/>
+          </a:xfrm>
+          <a:prstGeom prst="rect">
+            <a:avLst/>
+          </a:prstGeom>
+          <a:noFill/>
+        </p:spPr>
+        <p:txBody>
+          <a:bodyPr wrap="square" lIns="127000" rIns="127000" tIns="50800" bIns="50800">
+            <a:spAutoFit/>
+          </a:bodyPr>
+          <a:lstStyle/>
+          <a:p>
+            <a:pPr>
+              <a:defRPr sz="2100" b="1">
+                <a:solidFill>
+                  <a:srgbClr val="15803D"/>
+                </a:solidFill>
+                <a:latin typeface="Calibri"/>
+              </a:defRPr>
+            </a:pPr>
+            <a:r>
+              <a:t>100.0%</a:t>
+            </a:r>
+          </a:p>
+          <a:p>
+            <a:pPr>
+              <a:spcBef>
+                <a:spcPts val="100"/>
+              </a:spcBef>
+              <a:defRPr sz="1000" b="1">
+                <a:solidFill>
+                  <a:srgbClr val="0F172A"/>
+                </a:solidFill>
+                <a:latin typeface="Calibri"/>
+              </a:defRPr>
+            </a:pPr>
+            <a:r>
+              <a:t>Plot → Price Match Rate</a:t>
+            </a:r>
+          </a:p>
+          <a:p>
+            <a:pPr>
+              <a:spcBef>
+                <a:spcPts val="100"/>
+              </a:spcBef>
+              <a:defRPr sz="850">
+                <a:solidFill>
+                  <a:srgbClr val="64748B"/>
+                </a:solidFill>
+                <a:latin typeface="Calibri"/>
+              </a:defRPr>
+            </a:pPr>
+            <a:r>
+              <a:t>15,090 / 15,090 Plots Aligned</a:t>
+            </a:r>
+          </a:p>
+        </p:txBody>
+      </p:sp>
+      <p:sp>
+        <p:nvSpPr>
+          <p:cNvPr id="14" name="Rounded Rectangle 13"/>
+          <p:cNvSpPr/>
+          <p:nvPr/>
+        </p:nvSpPr>
+        <p:spPr>
+          <a:xfrm>
+            <a:off x="6181344" y="1645920"/>
+            <a:ext cx="2633472" cy="841248"/>
+          </a:xfrm>
+          <a:prstGeom prst="roundRect">
+            <a:avLst/>
+          </a:prstGeom>
+          <a:solidFill>
+            <a:srgbClr val="FFFFFF"/>
+          </a:solidFill>
+          <a:ln w="12700">
+            <a:solidFill>
+              <a:srgbClr val="E2E8F0"/>
+            </a:solidFill>
+          </a:ln>
+        </p:spPr>
+        <p:style>
+          <a:lnRef idx="1">
+            <a:schemeClr val="accent1"/>
+          </a:lnRef>
+          <a:fillRef idx="3">
+            <a:schemeClr val="accent1"/>
+          </a:fillRef>
+          <a:effectRef idx="2">
+            <a:schemeClr val="accent1"/>
+          </a:effectRef>
+          <a:fontRef idx="minor">
+            <a:schemeClr val="lt1"/>
+          </a:fontRef>
+        </p:style>
+        <p:txBody>
+          <a:bodyPr rtlCol="0" anchor="ctr"/>
+          <a:lstStyle/>
+          <a:p>
+            <a:pPr algn="ctr"/>
+          </a:p>
+        </p:txBody>
+      </p:sp>
+      <p:sp>
+        <p:nvSpPr>
+          <p:cNvPr id="15" name="Rounded Rectangle 14"/>
+          <p:cNvSpPr/>
+          <p:nvPr/>
+        </p:nvSpPr>
+        <p:spPr>
+          <a:xfrm>
+            <a:off x="6181344" y="1645920"/>
+            <a:ext cx="2633472" cy="54864"/>
+          </a:xfrm>
+          <a:prstGeom prst="roundRect">
+            <a:avLst/>
+          </a:prstGeom>
+          <a:solidFill>
+            <a:srgbClr val="D97706"/>
+          </a:solidFill>
+          <a:ln>
+            <a:noFill/>
+          </a:ln>
+        </p:spPr>
+        <p:style>
+          <a:lnRef idx="1">
+            <a:schemeClr val="accent1"/>
+          </a:lnRef>
+          <a:fillRef idx="3">
+            <a:schemeClr val="accent1"/>
+          </a:fillRef>
+          <a:effectRef idx="2">
+            <a:schemeClr val="accent1"/>
+          </a:effectRef>
+          <a:fontRef idx="minor">
+            <a:schemeClr val="lt1"/>
+          </a:fontRef>
+        </p:style>
+        <p:txBody>
+          <a:bodyPr rtlCol="0" anchor="ctr"/>
+          <a:lstStyle/>
+          <a:p>
+            <a:pPr algn="ctr"/>
+          </a:p>
+        </p:txBody>
+      </p:sp>
+      <p:sp>
+        <p:nvSpPr>
+          <p:cNvPr id="16" name="TextBox 15"/>
+          <p:cNvSpPr txBox="1"/>
+          <p:nvPr/>
+        </p:nvSpPr>
+        <p:spPr>
+          <a:xfrm>
+            <a:off x="6181344" y="1719072"/>
+            <a:ext cx="2633472" cy="749808"/>
+          </a:xfrm>
+          <a:prstGeom prst="rect">
+            <a:avLst/>
+          </a:prstGeom>
+          <a:noFill/>
+        </p:spPr>
+        <p:txBody>
+          <a:bodyPr wrap="square" lIns="127000" rIns="127000" tIns="50800" bIns="50800">
+            <a:spAutoFit/>
+          </a:bodyPr>
+          <a:lstStyle/>
+          <a:p>
+            <a:pPr>
+              <a:defRPr sz="2100" b="1">
+                <a:solidFill>
+                  <a:srgbClr val="D97706"/>
+                </a:solidFill>
+                <a:latin typeface="Calibri"/>
+              </a:defRPr>
+            </a:pPr>
+            <a:r>
+              <a:t>4-Month</a:t>
+            </a:r>
+          </a:p>
+          <a:p>
+            <a:pPr>
+              <a:spcBef>
+                <a:spcPts val="100"/>
+              </a:spcBef>
+              <a:defRPr sz="1000" b="1">
+                <a:solidFill>
+                  <a:srgbClr val="0F172A"/>
+                </a:solidFill>
+                <a:latin typeface="Calibri"/>
+              </a:defRPr>
+            </a:pPr>
+            <a:r>
+              <a:t>Growing Season Climate Window</a:t>
+            </a:r>
+          </a:p>
+          <a:p>
+            <a:pPr>
+              <a:spcBef>
+                <a:spcPts val="100"/>
+              </a:spcBef>
+              <a:defRPr sz="850">
+                <a:solidFill>
+                  <a:srgbClr val="64748B"/>
+                </a:solidFill>
+                <a:latin typeface="Calibri"/>
+              </a:defRPr>
+            </a:pPr>
+            <a:r>
+              <a:t>[Planting Month + 3 Subsequent]</a:t>
+            </a:r>
+          </a:p>
+        </p:txBody>
+      </p:sp>
+      <p:sp>
+        <p:nvSpPr>
+          <p:cNvPr id="17" name="Rounded Rectangle 16"/>
+          <p:cNvSpPr/>
+          <p:nvPr/>
+        </p:nvSpPr>
+        <p:spPr>
+          <a:xfrm>
+            <a:off x="8997696" y="1645920"/>
+            <a:ext cx="2633472" cy="841248"/>
+          </a:xfrm>
+          <a:prstGeom prst="roundRect">
+            <a:avLst/>
+          </a:prstGeom>
+          <a:solidFill>
+            <a:srgbClr val="FFFFFF"/>
+          </a:solidFill>
+          <a:ln w="12700">
+            <a:solidFill>
+              <a:srgbClr val="E2E8F0"/>
+            </a:solidFill>
+          </a:ln>
+        </p:spPr>
+        <p:style>
+          <a:lnRef idx="1">
+            <a:schemeClr val="accent1"/>
+          </a:lnRef>
+          <a:fillRef idx="3">
+            <a:schemeClr val="accent1"/>
+          </a:fillRef>
+          <a:effectRef idx="2">
+            <a:schemeClr val="accent1"/>
+          </a:effectRef>
+          <a:fontRef idx="minor">
+            <a:schemeClr val="lt1"/>
+          </a:fontRef>
+        </p:style>
+        <p:txBody>
+          <a:bodyPr rtlCol="0" anchor="ctr"/>
+          <a:lstStyle/>
+          <a:p>
+            <a:pPr algn="ctr"/>
+          </a:p>
+        </p:txBody>
+      </p:sp>
+      <p:sp>
+        <p:nvSpPr>
+          <p:cNvPr id="18" name="Rounded Rectangle 17"/>
+          <p:cNvSpPr/>
+          <p:nvPr/>
+        </p:nvSpPr>
+        <p:spPr>
+          <a:xfrm>
+            <a:off x="8997696" y="1645920"/>
+            <a:ext cx="2633472" cy="54864"/>
+          </a:xfrm>
+          <a:prstGeom prst="roundRect">
+            <a:avLst/>
+          </a:prstGeom>
+          <a:solidFill>
+            <a:srgbClr val="0369A1"/>
+          </a:solidFill>
+          <a:ln>
+            <a:noFill/>
+          </a:ln>
+        </p:spPr>
+        <p:style>
+          <a:lnRef idx="1">
+            <a:schemeClr val="accent1"/>
+          </a:lnRef>
+          <a:fillRef idx="3">
+            <a:schemeClr val="accent1"/>
+          </a:fillRef>
+          <a:effectRef idx="2">
+            <a:schemeClr val="accent1"/>
+          </a:effectRef>
+          <a:fontRef idx="minor">
+            <a:schemeClr val="lt1"/>
+          </a:fontRef>
+        </p:style>
+        <p:txBody>
+          <a:bodyPr rtlCol="0" anchor="ctr"/>
+          <a:lstStyle/>
+          <a:p>
+            <a:pPr algn="ctr"/>
+          </a:p>
+        </p:txBody>
+      </p:sp>
+      <p:sp>
+        <p:nvSpPr>
+          <p:cNvPr id="19" name="TextBox 18"/>
+          <p:cNvSpPr txBox="1"/>
+          <p:nvPr/>
+        </p:nvSpPr>
+        <p:spPr>
+          <a:xfrm>
+            <a:off x="8997696" y="1719072"/>
+            <a:ext cx="2633472" cy="749808"/>
+          </a:xfrm>
+          <a:prstGeom prst="rect">
+            <a:avLst/>
+          </a:prstGeom>
+          <a:noFill/>
+        </p:spPr>
+        <p:txBody>
+          <a:bodyPr wrap="square" lIns="127000" rIns="127000" tIns="50800" bIns="50800">
+            <a:spAutoFit/>
+          </a:bodyPr>
+          <a:lstStyle/>
+          <a:p>
+            <a:pPr>
+              <a:defRPr sz="2100" b="1">
+                <a:solidFill>
+                  <a:srgbClr val="0369A1"/>
+                </a:solidFill>
+                <a:latin typeface="Calibri"/>
+              </a:defRPr>
+            </a:pPr>
+            <a:r>
+              <a:t>0 Rows Lost</a:t>
+            </a:r>
+          </a:p>
+          <a:p>
+            <a:pPr>
+              <a:spcBef>
+                <a:spcPts val="100"/>
+              </a:spcBef>
+              <a:defRPr sz="1000" b="1">
+                <a:solidFill>
+                  <a:srgbClr val="0F172A"/>
+                </a:solidFill>
+                <a:latin typeface="Calibri"/>
+              </a:defRPr>
+            </a:pPr>
+            <a:r>
+              <a:t>Zero Cartesian Row Explosion</a:t>
+            </a:r>
+          </a:p>
+          <a:p>
+            <a:pPr>
+              <a:spcBef>
+                <a:spcPts val="100"/>
+              </a:spcBef>
+              <a:defRPr sz="850">
+                <a:solidFill>
+                  <a:srgbClr val="64748B"/>
+                </a:solidFill>
+                <a:latin typeface="Calibri"/>
+              </a:defRPr>
+            </a:pPr>
+            <a:r>
+              <a:t>15,090 Train | 3,750 Test Plots</a:t>
+            </a:r>
+          </a:p>
+        </p:txBody>
+      </p:sp>
+      <p:sp>
+        <p:nvSpPr>
+          <p:cNvPr id="20" name="Rounded Rectangle 19"/>
+          <p:cNvSpPr/>
+          <p:nvPr/>
+        </p:nvSpPr>
+        <p:spPr>
+          <a:xfrm>
+            <a:off x="548640" y="2651760"/>
+            <a:ext cx="5440680" cy="3621024"/>
+          </a:xfrm>
+          <a:prstGeom prst="roundRect">
+            <a:avLst/>
+          </a:prstGeom>
+          <a:solidFill>
+            <a:srgbClr val="FFFFFF"/>
+          </a:solidFill>
+          <a:ln w="12700">
+            <a:solidFill>
+              <a:srgbClr val="E2E8F0"/>
+            </a:solidFill>
+          </a:ln>
+        </p:spPr>
+        <p:style>
+          <a:lnRef idx="1">
+            <a:schemeClr val="accent1"/>
+          </a:lnRef>
+          <a:fillRef idx="3">
+            <a:schemeClr val="accent1"/>
+          </a:fillRef>
+          <a:effectRef idx="2">
+            <a:schemeClr val="accent1"/>
+          </a:effectRef>
+          <a:fontRef idx="minor">
+            <a:schemeClr val="lt1"/>
+          </a:fontRef>
+        </p:style>
+        <p:txBody>
+          <a:bodyPr rtlCol="0" anchor="ctr"/>
+          <a:lstStyle/>
+          <a:p>
+            <a:pPr algn="ctr"/>
+          </a:p>
+        </p:txBody>
+      </p:sp>
+      <p:sp>
+        <p:nvSpPr>
+          <p:cNvPr id="21" name="TextBox 20"/>
+          <p:cNvSpPr txBox="1"/>
+          <p:nvPr/>
+        </p:nvSpPr>
+        <p:spPr>
+          <a:xfrm>
+            <a:off x="685800" y="2761488"/>
+            <a:ext cx="5166360" cy="411480"/>
+          </a:xfrm>
+          <a:prstGeom prst="rect">
+            <a:avLst/>
+          </a:prstGeom>
+          <a:noFill/>
+        </p:spPr>
+        <p:txBody>
+          <a:bodyPr wrap="square" lIns="0" tIns="0">
+            <a:spAutoFit/>
+          </a:bodyPr>
+          <a:lstStyle/>
+          <a:p>
+            <a:pPr>
+              <a:defRPr sz="1300" b="1">
+                <a:solidFill>
+                  <a:srgbClr val="143D2B"/>
+                </a:solidFill>
+                <a:latin typeface="Calibri"/>
+              </a:defRPr>
+            </a:pPr>
+            <a:r>
+              <a:t>1. Automated Data Cleaning &amp; Hygiene</a:t>
+            </a:r>
+          </a:p>
+        </p:txBody>
+      </p:sp>
+      <p:sp>
+        <p:nvSpPr>
+          <p:cNvPr id="22" name="TextBox 21"/>
+          <p:cNvSpPr txBox="1"/>
+          <p:nvPr/>
+        </p:nvSpPr>
+        <p:spPr>
+          <a:xfrm>
+            <a:off x="731520" y="3154680"/>
+            <a:ext cx="5074920" cy="3026664"/>
+          </a:xfrm>
+          <a:prstGeom prst="rect">
+            <a:avLst/>
+          </a:prstGeom>
+          <a:noFill/>
+        </p:spPr>
+        <p:txBody>
+          <a:bodyPr wrap="square">
+            <a:spAutoFit/>
+          </a:bodyPr>
+          <a:lstStyle/>
+          <a:p>
+            <a:pPr>
+              <a:spcBef>
+                <a:spcPts val="500"/>
+              </a:spcBef>
+              <a:defRPr sz="1000">
+                <a:latin typeface="Calibri"/>
+              </a:defRPr>
+            </a:pPr>
+            <a:r>
+              <a:rPr b="1">
+                <a:solidFill>
+                  <a:srgbClr val="15803D"/>
+                </a:solidFill>
+              </a:rPr>
+              <a:t>• </a:t>
+            </a:r>
+            <a:r>
+              <a:rPr b="1">
+                <a:solidFill>
+                  <a:srgbClr val="0F172A"/>
+                </a:solidFill>
+              </a:rPr>
+              <a:t>Key Harmonization (100% Match): </a:t>
+            </a:r>
+            <a:r>
+              <a:rPr b="0">
+                <a:solidFill>
+                  <a:srgbClr val="0F172A"/>
+                </a:solidFill>
+              </a:rPr>
+              <a:t>Normalized 20 dirty region codes ('AMH', 'Amhara ', 'ORO') and 21 crop spelling variants ('Tef', ' teff ') to canonical sets ('Amhara', 'Oromia', 'SNNPR', 'Somali', 'Tigray' and 'teff', 'wheat', 'maize', 'sorghum', 'barley').</a:t>
+            </a:r>
+          </a:p>
+          <a:p>
+            <a:pPr>
+              <a:spcBef>
+                <a:spcPts val="700"/>
+              </a:spcBef>
+              <a:defRPr sz="1000">
+                <a:latin typeface="Calibri"/>
+              </a:defRPr>
+            </a:pPr>
+            <a:r>
+              <a:rPr b="1">
+                <a:solidFill>
+                  <a:srgbClr val="15803D"/>
+                </a:solidFill>
+              </a:rPr>
+              <a:t>• </a:t>
+            </a:r>
+            <a:r>
+              <a:rPr b="1">
+                <a:solidFill>
+                  <a:srgbClr val="0F172A"/>
+                </a:solidFill>
+              </a:rPr>
+              <a:t>Sentinel Value Remediation: </a:t>
+            </a:r>
+            <a:r>
+              <a:rPr b="0">
+                <a:solidFill>
+                  <a:srgbClr val="0F172A"/>
+                </a:solidFill>
+              </a:rPr>
+              <a:t>Replaced corrupt -999 sentinels (788 records) in pest_disease_flag (mode=0) and labor_days_per_ha (median=45.04) to prevent severe gradient loss distortion.</a:t>
+            </a:r>
+          </a:p>
+          <a:p>
+            <a:pPr>
+              <a:spcBef>
+                <a:spcPts val="700"/>
+              </a:spcBef>
+              <a:defRPr sz="1000">
+                <a:latin typeface="Calibri"/>
+              </a:defRPr>
+            </a:pPr>
+            <a:r>
+              <a:rPr b="1">
+                <a:solidFill>
+                  <a:srgbClr val="15803D"/>
+                </a:solidFill>
+              </a:rPr>
+              <a:t>• </a:t>
+            </a:r>
+            <a:r>
+              <a:rPr b="1">
+                <a:solidFill>
+                  <a:srgbClr val="0F172A"/>
+                </a:solidFill>
+              </a:rPr>
+              <a:t>Price Unit Scaling (100× Fix): </a:t>
+            </a:r>
+            <a:r>
+              <a:rPr b="0">
+                <a:solidFill>
+                  <a:srgbClr val="0F172A"/>
+                </a:solidFill>
+              </a:rPr>
+              <a:t>Identified 4 market price rows recorded in Birr/kg (&lt;500 Birr) and multiplied by 100 to restore standard Birr/quintal (3,400–4,900 Birr/qt).</a:t>
+            </a:r>
+          </a:p>
+          <a:p>
+            <a:pPr>
+              <a:spcBef>
+                <a:spcPts val="700"/>
+              </a:spcBef>
+              <a:defRPr sz="1000">
+                <a:latin typeface="Calibri"/>
+              </a:defRPr>
+            </a:pPr>
+            <a:r>
+              <a:rPr b="1">
+                <a:solidFill>
+                  <a:srgbClr val="15803D"/>
+                </a:solidFill>
+              </a:rPr>
+              <a:t>• </a:t>
+            </a:r>
+            <a:r>
+              <a:rPr b="1">
+                <a:solidFill>
+                  <a:srgbClr val="0F172A"/>
+                </a:solidFill>
+              </a:rPr>
+              <a:t>Outlier Capping &amp; Deduplication: </a:t>
+            </a:r>
+            <a:r>
+              <a:rPr b="0">
+                <a:solidFill>
+                  <a:srgbClr val="0F172A"/>
+                </a:solidFill>
+              </a:rPr>
+              <a:t>Capped inputs at 99.5th percentile using training statistics only (Rule 6). Purged 6 duplicate monthly station climate pairs.</a:t>
+            </a:r>
+          </a:p>
+          <a:p>
+            <a:pPr>
+              <a:spcBef>
+                <a:spcPts val="700"/>
+              </a:spcBef>
+              <a:defRPr sz="1000">
+                <a:latin typeface="Calibri"/>
+              </a:defRPr>
+            </a:pPr>
+            <a:r>
+              <a:rPr b="1">
+                <a:solidFill>
+                  <a:srgbClr val="15803D"/>
+                </a:solidFill>
+              </a:rPr>
+              <a:t>• </a:t>
+            </a:r>
+            <a:r>
+              <a:rPr b="1">
+                <a:solidFill>
+                  <a:srgbClr val="0F172A"/>
+                </a:solidFill>
+              </a:rPr>
+              <a:t>Verified Deliverables: </a:t>
+            </a:r>
+            <a:r>
+              <a:rPr b="0">
+                <a:solidFill>
+                  <a:srgbClr val="0F172A"/>
+                </a:solidFill>
+              </a:rPr>
+              <a:t>Exported master_train.csv (15,090 × 26) and master_test.csv (3,750 × 25) with documented data_dictionary_master.csv.</a:t>
+            </a:r>
+          </a:p>
+        </p:txBody>
+      </p:sp>
+      <p:sp>
+        <p:nvSpPr>
+          <p:cNvPr id="23" name="Rounded Rectangle 22"/>
+          <p:cNvSpPr/>
+          <p:nvPr/>
+        </p:nvSpPr>
+        <p:spPr>
+          <a:xfrm>
+            <a:off x="6172200" y="2651760"/>
+            <a:ext cx="5468112" cy="3621024"/>
+          </a:xfrm>
+          <a:prstGeom prst="roundRect">
+            <a:avLst/>
+          </a:prstGeom>
+          <a:solidFill>
+            <a:srgbClr val="FFFFFF"/>
+          </a:solidFill>
+          <a:ln w="12700">
+            <a:solidFill>
+              <a:srgbClr val="E2E8F0"/>
+            </a:solidFill>
+          </a:ln>
+        </p:spPr>
+        <p:style>
+          <a:lnRef idx="1">
+            <a:schemeClr val="accent1"/>
+          </a:lnRef>
+          <a:fillRef idx="3">
+            <a:schemeClr val="accent1"/>
+          </a:fillRef>
+          <a:effectRef idx="2">
+            <a:schemeClr val="accent1"/>
+          </a:effectRef>
+          <a:fontRef idx="minor">
+            <a:schemeClr val="lt1"/>
+          </a:fontRef>
+        </p:style>
+        <p:txBody>
+          <a:bodyPr rtlCol="0" anchor="ctr"/>
+          <a:lstStyle/>
+          <a:p>
+            <a:pPr algn="ctr"/>
+          </a:p>
+        </p:txBody>
+      </p:sp>
+      <p:sp>
+        <p:nvSpPr>
+          <p:cNvPr id="24" name="TextBox 23"/>
+          <p:cNvSpPr txBox="1"/>
+          <p:nvPr/>
+        </p:nvSpPr>
+        <p:spPr>
+          <a:xfrm>
+            <a:off x="6309360" y="2761488"/>
+            <a:ext cx="5193792" cy="411480"/>
+          </a:xfrm>
+          <a:prstGeom prst="rect">
+            <a:avLst/>
+          </a:prstGeom>
+          <a:noFill/>
+        </p:spPr>
+        <p:txBody>
+          <a:bodyPr wrap="square" lIns="0" tIns="0">
+            <a:spAutoFit/>
+          </a:bodyPr>
+          <a:lstStyle/>
+          <a:p>
+            <a:pPr>
+              <a:defRPr sz="1300" b="1">
+                <a:solidFill>
+                  <a:srgbClr val="143D2B"/>
+                </a:solidFill>
+                <a:latin typeface="Calibri"/>
+              </a:defRPr>
+            </a:pPr>
+            <a:r>
+              <a:t>2. Dynamic Spatio-Temporal Climate Join</a:t>
+            </a:r>
+          </a:p>
+        </p:txBody>
+      </p:sp>
+      <p:sp>
+        <p:nvSpPr>
+          <p:cNvPr id="25" name="TextBox 24"/>
+          <p:cNvSpPr txBox="1"/>
+          <p:nvPr/>
+        </p:nvSpPr>
+        <p:spPr>
+          <a:xfrm>
+            <a:off x="6355080" y="3154680"/>
+            <a:ext cx="5102352" cy="3026664"/>
+          </a:xfrm>
+          <a:prstGeom prst="rect">
+            <a:avLst/>
+          </a:prstGeom>
+          <a:noFill/>
+        </p:spPr>
+        <p:txBody>
+          <a:bodyPr wrap="square">
+            <a:spAutoFit/>
+          </a:bodyPr>
+          <a:lstStyle/>
+          <a:p>
+            <a:pPr>
+              <a:spcBef>
+                <a:spcPts val="500"/>
+              </a:spcBef>
+              <a:defRPr sz="1000">
+                <a:latin typeface="Calibri"/>
+              </a:defRPr>
+            </a:pPr>
+            <a:r>
+              <a:rPr b="1">
+                <a:solidFill>
+                  <a:srgbClr val="15803D"/>
+                </a:solidFill>
+              </a:rPr>
+              <a:t>• </a:t>
+            </a:r>
+            <a:r>
+              <a:rPr b="1">
+                <a:solidFill>
+                  <a:srgbClr val="0F172A"/>
+                </a:solidFill>
+              </a:rPr>
+              <a:t>Agronomic Window Definition: </a:t>
+            </a:r>
+            <a:r>
+              <a:rPr b="0">
+                <a:solidFill>
+                  <a:srgbClr val="0F172A"/>
+                </a:solidFill>
+              </a:rPr>
+              <a:t>Rather than static annual means, aggregated monthly climate metrics dynamically across [planting_month, planting_month + 3] (4-month growing season) per region and year, accurately capturing Belg &amp; Meher cycles.</a:t>
+            </a:r>
+          </a:p>
+          <a:p>
+            <a:pPr>
+              <a:spcBef>
+                <a:spcPts val="700"/>
+              </a:spcBef>
+              <a:defRPr sz="1000">
+                <a:latin typeface="Calibri"/>
+              </a:defRPr>
+            </a:pPr>
+            <a:r>
+              <a:rPr b="1">
+                <a:solidFill>
+                  <a:srgbClr val="15803D"/>
+                </a:solidFill>
+              </a:rPr>
+              <a:t>• </a:t>
+            </a:r>
+            <a:r>
+              <a:rPr b="1">
+                <a:solidFill>
+                  <a:srgbClr val="0F172A"/>
+                </a:solidFill>
+              </a:rPr>
+              <a:t>High Data Coverage: </a:t>
+            </a:r>
+            <a:r>
+              <a:rPr b="0">
+                <a:solidFill>
+                  <a:srgbClr val="0F172A"/>
+                </a:solidFill>
+              </a:rPr>
+              <a:t>80.1% of plots have all 4 complete monthly records; 16.9% have 3 months. Zero plots have &lt;2 months.</a:t>
+            </a:r>
+          </a:p>
+          <a:p>
+            <a:pPr>
+              <a:spcBef>
+                <a:spcPts val="700"/>
+              </a:spcBef>
+              <a:defRPr sz="1000">
+                <a:latin typeface="Calibri"/>
+              </a:defRPr>
+            </a:pPr>
+            <a:r>
+              <a:rPr b="1">
+                <a:solidFill>
+                  <a:srgbClr val="15803D"/>
+                </a:solidFill>
+              </a:rPr>
+              <a:t>• </a:t>
+            </a:r>
+            <a:r>
+              <a:rPr b="1">
+                <a:solidFill>
+                  <a:srgbClr val="0F172A"/>
+                </a:solidFill>
+              </a:rPr>
+              <a:t>weather_season_mean_temp &amp; heat_days: </a:t>
+            </a:r>
+            <a:r>
+              <a:rPr b="0">
+                <a:solidFill>
+                  <a:srgbClr val="0F172A"/>
+                </a:solidFill>
+              </a:rPr>
+              <a:t>Measures average thermal regime and cumulative extreme heat stress days (&gt;32°C) during critical flowering and grain-filling stages.</a:t>
+            </a:r>
+          </a:p>
+          <a:p>
+            <a:pPr>
+              <a:spcBef>
+                <a:spcPts val="700"/>
+              </a:spcBef>
+              <a:defRPr sz="1000">
+                <a:latin typeface="Calibri"/>
+              </a:defRPr>
+            </a:pPr>
+            <a:r>
+              <a:rPr b="1">
+                <a:solidFill>
+                  <a:srgbClr val="15803D"/>
+                </a:solidFill>
+              </a:rPr>
+              <a:t>• </a:t>
+            </a:r>
+            <a:r>
+              <a:rPr b="1">
+                <a:solidFill>
+                  <a:srgbClr val="0F172A"/>
+                </a:solidFill>
+              </a:rPr>
+              <a:t>weather_temp_anomaly_c: </a:t>
+            </a:r>
+            <a:r>
+              <a:rPr b="0">
+                <a:solidFill>
+                  <a:srgbClr val="0F172A"/>
+                </a:solidFill>
+              </a:rPr>
+              <a:t>Quantifies deviation from 4-year regional baseline, pinpointing localized warming shocks.</a:t>
+            </a:r>
+          </a:p>
+          <a:p>
+            <a:pPr>
+              <a:spcBef>
+                <a:spcPts val="700"/>
+              </a:spcBef>
+              <a:defRPr sz="1000">
+                <a:latin typeface="Calibri"/>
+              </a:defRPr>
+            </a:pPr>
+            <a:r>
+              <a:rPr b="1">
+                <a:solidFill>
+                  <a:srgbClr val="15803D"/>
+                </a:solidFill>
+              </a:rPr>
+              <a:t>• </a:t>
+            </a:r>
+            <a:r>
+              <a:rPr b="1">
+                <a:solidFill>
+                  <a:srgbClr val="0F172A"/>
+                </a:solidFill>
+              </a:rPr>
+              <a:t>weather_rain_discrepancy_ratio: </a:t>
+            </a:r>
+            <a:r>
+              <a:rPr b="0">
+                <a:solidFill>
+                  <a:srgbClr val="0F172A"/>
+                </a:solidFill>
+              </a:rPr>
+              <a:t>Calculates ratio between plot self-reported rainfall and station gauges, effectively capturing highland topographic microclimates.</a:t>
+            </a:r>
+          </a:p>
+          <a:p>
+            <a:pPr>
+              <a:spcBef>
+                <a:spcPts val="700"/>
+              </a:spcBef>
+              <a:defRPr sz="1000">
+                <a:latin typeface="Calibri"/>
+              </a:defRPr>
+            </a:pPr>
+            <a:r>
+              <a:rPr b="1">
+                <a:solidFill>
+                  <a:srgbClr val="15803D"/>
+                </a:solidFill>
+              </a:rPr>
+              <a:t>• </a:t>
+            </a:r>
+            <a:r>
+              <a:rPr b="1">
+                <a:solidFill>
+                  <a:srgbClr val="0F172A"/>
+                </a:solidFill>
+              </a:rPr>
+              <a:t>altitude_temp_index: </a:t>
+            </a:r>
+            <a:r>
+              <a:rPr b="0">
+                <a:solidFill>
+                  <a:srgbClr val="0F172A"/>
+                </a:solidFill>
+              </a:rPr>
+              <a:t>Models adiabatic lapse cooling rate across rugged agricultural elevations.</a:t>
             </a:r>
           </a:p>
         </p:txBody>
@@ -3280,14 +6054,112 @@
       <p:grpSpPr/>
       <p:sp>
         <p:nvSpPr>
-          <p:cNvPr id="2" name="TextBox 1"/>
+          <p:cNvPr id="2" name="Rectangle 1"/>
+          <p:cNvSpPr/>
+          <p:nvPr/>
+        </p:nvSpPr>
+        <p:spPr>
+          <a:xfrm>
+            <a:off x="0" y="0"/>
+            <a:ext cx="12191695" cy="6858000"/>
+          </a:xfrm>
+          <a:prstGeom prst="rect">
+            <a:avLst/>
+          </a:prstGeom>
+          <a:solidFill>
+            <a:srgbClr val="FAF9F5"/>
+          </a:solidFill>
+          <a:ln>
+            <a:noFill/>
+          </a:ln>
+        </p:spPr>
+        <p:style>
+          <a:lnRef idx="1">
+            <a:schemeClr val="accent1"/>
+          </a:lnRef>
+          <a:fillRef idx="3">
+            <a:schemeClr val="accent1"/>
+          </a:fillRef>
+          <a:effectRef idx="2">
+            <a:schemeClr val="accent1"/>
+          </a:effectRef>
+          <a:fontRef idx="minor">
+            <a:schemeClr val="lt1"/>
+          </a:fontRef>
+        </p:style>
+        <p:txBody>
+          <a:bodyPr rtlCol="0" anchor="ctr"/>
+          <a:lstStyle/>
+          <a:p>
+            <a:pPr algn="ctr"/>
+          </a:p>
+        </p:txBody>
+      </p:sp>
+      <p:sp>
+        <p:nvSpPr>
+          <p:cNvPr id="3" name="Rounded Rectangle 2"/>
+          <p:cNvSpPr/>
+          <p:nvPr/>
+        </p:nvSpPr>
+        <p:spPr>
+          <a:xfrm>
+            <a:off x="548640" y="384048"/>
+            <a:ext cx="5330952" cy="292608"/>
+          </a:xfrm>
+          <a:prstGeom prst="roundRect">
+            <a:avLst/>
+          </a:prstGeom>
+          <a:solidFill>
+            <a:srgbClr val="ECFDF5"/>
+          </a:solidFill>
+          <a:ln w="12700">
+            <a:solidFill>
+              <a:srgbClr val="065F46"/>
+            </a:solidFill>
+          </a:ln>
+        </p:spPr>
+        <p:style>
+          <a:lnRef idx="1">
+            <a:schemeClr val="accent1"/>
+          </a:lnRef>
+          <a:fillRef idx="3">
+            <a:schemeClr val="accent1"/>
+          </a:fillRef>
+          <a:effectRef idx="2">
+            <a:schemeClr val="accent1"/>
+          </a:effectRef>
+          <a:fontRef idx="minor">
+            <a:schemeClr val="lt1"/>
+          </a:fontRef>
+        </p:style>
+        <p:txBody>
+          <a:bodyPr rtlCol="0" anchor="ctr" wrap="none" tIns="25400" bIns="25400" lIns="101600" rIns="101600"/>
+          <a:lstStyle/>
+          <a:p>
+            <a:pPr algn="ctr">
+              <a:defRPr sz="950" b="1">
+                <a:solidFill>
+                  <a:srgbClr val="065F46"/>
+                </a:solidFill>
+                <a:latin typeface="Calibri"/>
+              </a:defRPr>
+            </a:pPr>
+            <a:r>
+              <a:t>DELIVERABLES B &amp; C | STATISTICAL &amp; AGRONOMIC INSIGHTS</a:t>
+            </a:r>
+          </a:p>
+        </p:txBody>
+      </p:sp>
+      <p:sp>
+        <p:nvSpPr>
+          <p:cNvPr id="4" name="TextBox 3"/>
           <p:cNvSpPr txBox="1"/>
           <p:nvPr/>
         </p:nvSpPr>
         <p:spPr>
           <a:xfrm>
-            <a:off x="731520" y="548640"/>
-            <a:ext cx="10698480" cy="1097280"/>
+            <a:off x="548640" y="713232"/>
+            <a:ext cx="11091672" cy="868680"/>
           </a:xfrm>
           <a:prstGeom prst="rect">
             <a:avLst/>
@@ -3295,30 +6167,94 @@
           <a:noFill/>
         </p:spPr>
         <p:txBody>
-          <a:bodyPr wrap="none">
+          <a:bodyPr wrap="square" lIns="0" rIns="0" tIns="0" bIns="0">
             <a:spAutoFit/>
           </a:bodyPr>
           <a:lstStyle/>
           <a:p>
             <a:pPr>
-              <a:defRPr sz="2800" b="1"/>
-            </a:pPr>
-            <a:r>
-              <a:t>Key Agronomic and Economic Findings</a:t>
-            </a:r>
-          </a:p>
-        </p:txBody>
-      </p:sp>
-      <p:sp>
-        <p:nvSpPr>
-          <p:cNvPr id="3" name="TextBox 2"/>
+              <a:defRPr sz="2100" b="1">
+                <a:solidFill>
+                  <a:srgbClr val="143D2B"/>
+                </a:solidFill>
+                <a:latin typeface="Calibri"/>
+              </a:defRPr>
+            </a:pPr>
+            <a:r>
+              <a:t>Key Insights: Market Value Disconnect &amp; Agronomic Limits</a:t>
+            </a:r>
+          </a:p>
+          <a:p>
+            <a:pPr>
+              <a:spcBef>
+                <a:spcPts val="200"/>
+              </a:spcBef>
+              <a:defRPr sz="1150">
+                <a:solidFill>
+                  <a:srgbClr val="64748B"/>
+                </a:solidFill>
+                <a:latin typeface="Calibri"/>
+              </a:defRPr>
+            </a:pPr>
+            <a:r>
+              <a:t>The Yield vs. Revenue Paradox, Input Response Ceilings, and Spatial Agro-Ecological Divergence</a:t>
+            </a:r>
+          </a:p>
+        </p:txBody>
+      </p:sp>
+      <p:sp>
+        <p:nvSpPr>
+          <p:cNvPr id="5" name="Rectangle 4"/>
+          <p:cNvSpPr/>
+          <p:nvPr/>
+        </p:nvSpPr>
+        <p:spPr>
+          <a:xfrm>
+            <a:off x="548640" y="6419088"/>
+            <a:ext cx="11091672" cy="13716"/>
+          </a:xfrm>
+          <a:prstGeom prst="rect">
+            <a:avLst/>
+          </a:prstGeom>
+          <a:solidFill>
+            <a:srgbClr val="E2E8F0"/>
+          </a:solidFill>
+          <a:ln>
+            <a:noFill/>
+          </a:ln>
+        </p:spPr>
+        <p:style>
+          <a:lnRef idx="1">
+            <a:schemeClr val="accent1"/>
+          </a:lnRef>
+          <a:fillRef idx="3">
+            <a:schemeClr val="accent1"/>
+          </a:fillRef>
+          <a:effectRef idx="2">
+            <a:schemeClr val="accent1"/>
+          </a:effectRef>
+          <a:fontRef idx="minor">
+            <a:schemeClr val="lt1"/>
+          </a:fontRef>
+        </p:style>
+        <p:txBody>
+          <a:bodyPr rtlCol="0" anchor="ctr"/>
+          <a:lstStyle/>
+          <a:p>
+            <a:pPr algn="ctr"/>
+          </a:p>
+        </p:txBody>
+      </p:sp>
+      <p:sp>
+        <p:nvSpPr>
+          <p:cNvPr id="6" name="TextBox 5"/>
           <p:cNvSpPr txBox="1"/>
           <p:nvPr/>
         </p:nvSpPr>
         <p:spPr>
           <a:xfrm>
-            <a:off x="731520" y="1645920"/>
-            <a:ext cx="10698480" cy="4572000"/>
+            <a:off x="548640" y="6455664"/>
+            <a:ext cx="7772400" cy="320040"/>
           </a:xfrm>
           <a:prstGeom prst="rect">
             <a:avLst/>
@@ -3326,29 +6262,405 @@
           <a:noFill/>
         </p:spPr>
         <p:txBody>
-          <a:bodyPr wrap="none">
+          <a:bodyPr wrap="none" lIns="0" tIns="0">
             <a:spAutoFit/>
           </a:bodyPr>
           <a:lstStyle/>
           <a:p>
             <a:pPr>
-              <a:defRPr sz="1800"/>
-            </a:pPr>
-            <a:r>
-              <a:t>Slide 3: Deliverables B and C — Core Data Insights</a:t>
-            </a:r>
-            <a:br/>
-            <a:br/>
-            <a:r>
-              <a:t>- Revenue vs Yield: Teff and high-value crops show distinct economic profiles</a:t>
-            </a:r>
-            <a:br/>
-            <a:r>
-              <a:t>- Agronomic Response: Diminishing returns in fertilizer application</a:t>
-            </a:r>
-            <a:br/>
-            <a:r>
-              <a:t>- Weather Sensitivity: Temperature shocks impact regional yield variability</a:t>
+              <a:defRPr sz="900">
+                <a:solidFill>
+                  <a:srgbClr val="64748B"/>
+                </a:solidFill>
+                <a:latin typeface="Calibri"/>
+              </a:defRPr>
+            </a:pPr>
+            <a:r>
+              <a:t>Team 11 | Ethiopian Smallholder Crop-Yield Challenge | AAU AI Hackathon 2026</a:t>
+            </a:r>
+          </a:p>
+        </p:txBody>
+      </p:sp>
+      <p:sp>
+        <p:nvSpPr>
+          <p:cNvPr id="7" name="TextBox 6"/>
+          <p:cNvSpPr txBox="1"/>
+          <p:nvPr/>
+        </p:nvSpPr>
+        <p:spPr>
+          <a:xfrm>
+            <a:off x="9811512" y="6455664"/>
+            <a:ext cx="1828800" cy="320040"/>
+          </a:xfrm>
+          <a:prstGeom prst="rect">
+            <a:avLst/>
+          </a:prstGeom>
+          <a:noFill/>
+        </p:spPr>
+        <p:txBody>
+          <a:bodyPr wrap="none" rIns="0" tIns="0">
+            <a:spAutoFit/>
+          </a:bodyPr>
+          <a:lstStyle/>
+          <a:p>
+            <a:pPr algn="r">
+              <a:defRPr sz="900" b="1">
+                <a:solidFill>
+                  <a:srgbClr val="143D2B"/>
+                </a:solidFill>
+                <a:latin typeface="Calibri"/>
+              </a:defRPr>
+            </a:pPr>
+            <a:r>
+              <a:t>Slide 3 of 5</a:t>
+            </a:r>
+          </a:p>
+        </p:txBody>
+      </p:sp>
+      <p:sp>
+        <p:nvSpPr>
+          <p:cNvPr id="8" name="Rounded Rectangle 7"/>
+          <p:cNvSpPr/>
+          <p:nvPr/>
+        </p:nvSpPr>
+        <p:spPr>
+          <a:xfrm>
+            <a:off x="548640" y="1645920"/>
+            <a:ext cx="5029200" cy="2267712"/>
+          </a:xfrm>
+          <a:prstGeom prst="roundRect">
+            <a:avLst/>
+          </a:prstGeom>
+          <a:solidFill>
+            <a:srgbClr val="FFFFFF"/>
+          </a:solidFill>
+          <a:ln w="12700">
+            <a:solidFill>
+              <a:srgbClr val="E2E8F0"/>
+            </a:solidFill>
+          </a:ln>
+        </p:spPr>
+        <p:style>
+          <a:lnRef idx="1">
+            <a:schemeClr val="accent1"/>
+          </a:lnRef>
+          <a:fillRef idx="3">
+            <a:schemeClr val="accent1"/>
+          </a:fillRef>
+          <a:effectRef idx="2">
+            <a:schemeClr val="accent1"/>
+          </a:effectRef>
+          <a:fontRef idx="minor">
+            <a:schemeClr val="lt1"/>
+          </a:fontRef>
+        </p:style>
+        <p:txBody>
+          <a:bodyPr rtlCol="0" anchor="ctr"/>
+          <a:lstStyle/>
+          <a:p>
+            <a:pPr algn="ctr"/>
+          </a:p>
+        </p:txBody>
+      </p:sp>
+      <p:pic>
+        <p:nvPicPr>
+          <p:cNvPr id="9" name="Picture 8" descr="fig09_revenue_by_crop_region.png"/>
+          <p:cNvPicPr>
+            <a:picLocks noChangeAspect="1"/>
+          </p:cNvPicPr>
+          <p:nvPr/>
+        </p:nvPicPr>
+        <p:blipFill>
+          <a:blip r:embed="rId2"/>
+          <a:stretch>
+            <a:fillRect/>
+          </a:stretch>
+        </p:blipFill>
+        <p:spPr>
+          <a:xfrm>
+            <a:off x="658368" y="1719072"/>
+            <a:ext cx="4809744" cy="2121408"/>
+          </a:xfrm>
+          <a:prstGeom prst="rect">
+            <a:avLst/>
+          </a:prstGeom>
+        </p:spPr>
+      </p:pic>
+      <p:sp>
+        <p:nvSpPr>
+          <p:cNvPr id="10" name="Rounded Rectangle 9"/>
+          <p:cNvSpPr/>
+          <p:nvPr/>
+        </p:nvSpPr>
+        <p:spPr>
+          <a:xfrm>
+            <a:off x="548640" y="4005072"/>
+            <a:ext cx="5029200" cy="2267712"/>
+          </a:xfrm>
+          <a:prstGeom prst="roundRect">
+            <a:avLst/>
+          </a:prstGeom>
+          <a:solidFill>
+            <a:srgbClr val="FFFFFF"/>
+          </a:solidFill>
+          <a:ln w="12700">
+            <a:solidFill>
+              <a:srgbClr val="E2E8F0"/>
+            </a:solidFill>
+          </a:ln>
+        </p:spPr>
+        <p:style>
+          <a:lnRef idx="1">
+            <a:schemeClr val="accent1"/>
+          </a:lnRef>
+          <a:fillRef idx="3">
+            <a:schemeClr val="accent1"/>
+          </a:fillRef>
+          <a:effectRef idx="2">
+            <a:schemeClr val="accent1"/>
+          </a:effectRef>
+          <a:fontRef idx="minor">
+            <a:schemeClr val="lt1"/>
+          </a:fontRef>
+        </p:style>
+        <p:txBody>
+          <a:bodyPr rtlCol="0" anchor="ctr"/>
+          <a:lstStyle/>
+          <a:p>
+            <a:pPr algn="ctr"/>
+          </a:p>
+        </p:txBody>
+      </p:sp>
+      <p:pic>
+        <p:nvPicPr>
+          <p:cNvPr id="11" name="Picture 10" descr="fig08_price_trends.png"/>
+          <p:cNvPicPr>
+            <a:picLocks noChangeAspect="1"/>
+          </p:cNvPicPr>
+          <p:nvPr/>
+        </p:nvPicPr>
+        <p:blipFill>
+          <a:blip r:embed="rId3"/>
+          <a:stretch>
+            <a:fillRect/>
+          </a:stretch>
+        </p:blipFill>
+        <p:spPr>
+          <a:xfrm>
+            <a:off x="658368" y="4078224"/>
+            <a:ext cx="4809744" cy="2121408"/>
+          </a:xfrm>
+          <a:prstGeom prst="rect">
+            <a:avLst/>
+          </a:prstGeom>
+        </p:spPr>
+      </p:pic>
+      <p:sp>
+        <p:nvSpPr>
+          <p:cNvPr id="12" name="Rounded Rectangle 11"/>
+          <p:cNvSpPr/>
+          <p:nvPr/>
+        </p:nvSpPr>
+        <p:spPr>
+          <a:xfrm>
+            <a:off x="5760720" y="1645920"/>
+            <a:ext cx="5879592" cy="4626864"/>
+          </a:xfrm>
+          <a:prstGeom prst="roundRect">
+            <a:avLst/>
+          </a:prstGeom>
+          <a:solidFill>
+            <a:srgbClr val="FFFFFF"/>
+          </a:solidFill>
+          <a:ln w="12700">
+            <a:solidFill>
+              <a:srgbClr val="E2E8F0"/>
+            </a:solidFill>
+          </a:ln>
+        </p:spPr>
+        <p:style>
+          <a:lnRef idx="1">
+            <a:schemeClr val="accent1"/>
+          </a:lnRef>
+          <a:fillRef idx="3">
+            <a:schemeClr val="accent1"/>
+          </a:fillRef>
+          <a:effectRef idx="2">
+            <a:schemeClr val="accent1"/>
+          </a:effectRef>
+          <a:fontRef idx="minor">
+            <a:schemeClr val="lt1"/>
+          </a:fontRef>
+        </p:style>
+        <p:txBody>
+          <a:bodyPr rtlCol="0" anchor="ctr"/>
+          <a:lstStyle/>
+          <a:p>
+            <a:pPr algn="ctr"/>
+          </a:p>
+        </p:txBody>
+      </p:sp>
+      <p:sp>
+        <p:nvSpPr>
+          <p:cNvPr id="13" name="TextBox 12"/>
+          <p:cNvSpPr txBox="1"/>
+          <p:nvPr/>
+        </p:nvSpPr>
+        <p:spPr>
+          <a:xfrm>
+            <a:off x="5897880" y="1755648"/>
+            <a:ext cx="5605272" cy="411480"/>
+          </a:xfrm>
+          <a:prstGeom prst="rect">
+            <a:avLst/>
+          </a:prstGeom>
+          <a:noFill/>
+        </p:spPr>
+        <p:txBody>
+          <a:bodyPr wrap="square" lIns="0" tIns="0">
+            <a:spAutoFit/>
+          </a:bodyPr>
+          <a:lstStyle/>
+          <a:p>
+            <a:pPr>
+              <a:defRPr sz="1300" b="1">
+                <a:solidFill>
+                  <a:srgbClr val="143D2B"/>
+                </a:solidFill>
+                <a:latin typeface="Calibri"/>
+              </a:defRPr>
+            </a:pPr>
+            <a:r>
+              <a:t>Empirical Agronomic &amp; Market Discoveries</a:t>
+            </a:r>
+          </a:p>
+        </p:txBody>
+      </p:sp>
+      <p:sp>
+        <p:nvSpPr>
+          <p:cNvPr id="14" name="TextBox 13"/>
+          <p:cNvSpPr txBox="1"/>
+          <p:nvPr/>
+        </p:nvSpPr>
+        <p:spPr>
+          <a:xfrm>
+            <a:off x="5943600" y="2148840"/>
+            <a:ext cx="5513832" cy="4032504"/>
+          </a:xfrm>
+          <a:prstGeom prst="rect">
+            <a:avLst/>
+          </a:prstGeom>
+          <a:noFill/>
+        </p:spPr>
+        <p:txBody>
+          <a:bodyPr wrap="square">
+            <a:spAutoFit/>
+          </a:bodyPr>
+          <a:lstStyle/>
+          <a:p>
+            <a:pPr>
+              <a:spcBef>
+                <a:spcPts val="500"/>
+              </a:spcBef>
+              <a:defRPr sz="980">
+                <a:latin typeface="Calibri"/>
+              </a:defRPr>
+            </a:pPr>
+            <a:r>
+              <a:rPr b="1">
+                <a:solidFill>
+                  <a:srgbClr val="15803D"/>
+                </a:solidFill>
+              </a:rPr>
+              <a:t>• </a:t>
+            </a:r>
+            <a:r>
+              <a:rPr b="1">
+                <a:solidFill>
+                  <a:srgbClr val="0F172A"/>
+                </a:solidFill>
+              </a:rPr>
+              <a:t>Finding 1: The Yield vs. Revenue Paradox (Economic Inversion): </a:t>
+            </a:r>
+            <a:r>
+              <a:rPr b="0">
+                <a:solidFill>
+                  <a:srgbClr val="0F172A"/>
+                </a:solidFill>
+              </a:rPr>
+              <a:t>Maize achieves the highest physical yield (mean 3.90 t/ha, peaking at 4.80 t/ha in SNNPR), but Teff generates the highest gross revenue per hectare (152,301 Birr/ha vs. 114,336 Birr/ha for Maize).
+• Agronomic Driver: Teff commands a 2.6× market price premium (7,652 vs. 2,927 Birr/quintal) due to cultural staple status and inelastic urban demand, proving smallholders rationally prioritize financial return over biological tonnage.
+• Direct UI Integration: AgriYield™ Pro connects directly to live regional quintal benchmarks and translates farm hectares into local Ethiopian units (1 ha ≈ 4 Timad) with automated P&amp;L cash-flow calculations.</a:t>
+            </a:r>
+          </a:p>
+          <a:p>
+            <a:pPr>
+              <a:spcBef>
+                <a:spcPts val="700"/>
+              </a:spcBef>
+              <a:defRPr sz="980">
+                <a:latin typeface="Calibri"/>
+              </a:defRPr>
+            </a:pPr>
+            <a:r>
+              <a:rPr b="1">
+                <a:solidFill>
+                  <a:srgbClr val="15803D"/>
+                </a:solidFill>
+              </a:rPr>
+              <a:t>• </a:t>
+            </a:r>
+            <a:r>
+              <a:rPr b="1">
+                <a:solidFill>
+                  <a:srgbClr val="0F172A"/>
+                </a:solidFill>
+              </a:rPr>
+              <a:t>Finding 2: Input Elasticity &amp; Biological Ceilings: </a:t>
+            </a:r>
+            <a:r>
+              <a:rPr b="0">
+                <a:solidFill>
+                  <a:srgbClr val="0F172A"/>
+                </a:solidFill>
+              </a:rPr>
+              <a:t>Fertilizer Diminishing Returns: Mean yield rises monotonically from Q1 (2.44 t/ha) to Q4 (3.09 t/ha), but marginal response flattens; Teff plateaus beyond Q2 (2.01 t/ha) as excess nitrogen triggers stem lodging rather than grain yield.
+• Improved Seed Lift: Certified seeds deliver a consistent +18.3% to +22.8% yield lift across all five crops (Maize: +0.783 t/ha; Teff: +0.419 t/ha).
+• Pest &amp; Disease Penalties: Biotic pressure inflicts -26% to -29% yield losses, hitting Maize hardest (-28.8% loss, -1.20 t/ha penalty) due to voracious defoliators like Fall Armyworm.</a:t>
+            </a:r>
+          </a:p>
+          <a:p>
+            <a:pPr>
+              <a:spcBef>
+                <a:spcPts val="700"/>
+              </a:spcBef>
+              <a:defRPr sz="980">
+                <a:latin typeface="Calibri"/>
+              </a:defRPr>
+            </a:pPr>
+            <a:r>
+              <a:rPr b="1">
+                <a:solidFill>
+                  <a:srgbClr val="15803D"/>
+                </a:solidFill>
+              </a:rPr>
+              <a:t>• </a:t>
+            </a:r>
+            <a:r>
+              <a:rPr b="1">
+                <a:solidFill>
+                  <a:srgbClr val="0F172A"/>
+                </a:solidFill>
+              </a:rPr>
+              <a:t>Finding 3: Agro-Ecological Divergence &amp; Thermal Regimes: </a:t>
+            </a:r>
+            <a:r>
+              <a:rPr b="0">
+                <a:solidFill>
+                  <a:srgbClr val="0F172A"/>
+                </a:solidFill>
+              </a:rPr>
+              <a:t>Highland zones in Tigray (3.13 t/ha) and Amhara (3.13 t/ha) lead national productivity, whereas pastoral Somali severely lags (1.46 t/ha; Somali × Teff: 0.83 t/ha) due to extreme thermal stress (&gt;30°C) and acute moisture deficits.</a:t>
             </a:r>
           </a:p>
         </p:txBody>
@@ -3373,14 +6685,112 @@
       <p:grpSpPr/>
       <p:sp>
         <p:nvSpPr>
-          <p:cNvPr id="2" name="TextBox 1"/>
+          <p:cNvPr id="2" name="Rectangle 1"/>
+          <p:cNvSpPr/>
+          <p:nvPr/>
+        </p:nvSpPr>
+        <p:spPr>
+          <a:xfrm>
+            <a:off x="0" y="0"/>
+            <a:ext cx="12191695" cy="6858000"/>
+          </a:xfrm>
+          <a:prstGeom prst="rect">
+            <a:avLst/>
+          </a:prstGeom>
+          <a:solidFill>
+            <a:srgbClr val="FAF9F5"/>
+          </a:solidFill>
+          <a:ln>
+            <a:noFill/>
+          </a:ln>
+        </p:spPr>
+        <p:style>
+          <a:lnRef idx="1">
+            <a:schemeClr val="accent1"/>
+          </a:lnRef>
+          <a:fillRef idx="3">
+            <a:schemeClr val="accent1"/>
+          </a:fillRef>
+          <a:effectRef idx="2">
+            <a:schemeClr val="accent1"/>
+          </a:effectRef>
+          <a:fontRef idx="minor">
+            <a:schemeClr val="lt1"/>
+          </a:fontRef>
+        </p:style>
+        <p:txBody>
+          <a:bodyPr rtlCol="0" anchor="ctr"/>
+          <a:lstStyle/>
+          <a:p>
+            <a:pPr algn="ctr"/>
+          </a:p>
+        </p:txBody>
+      </p:sp>
+      <p:sp>
+        <p:nvSpPr>
+          <p:cNvPr id="3" name="Rounded Rectangle 2"/>
+          <p:cNvSpPr/>
+          <p:nvPr/>
+        </p:nvSpPr>
+        <p:spPr>
+          <a:xfrm>
+            <a:off x="548640" y="384048"/>
+            <a:ext cx="4727448" cy="292608"/>
+          </a:xfrm>
+          <a:prstGeom prst="roundRect">
+            <a:avLst/>
+          </a:prstGeom>
+          <a:solidFill>
+            <a:srgbClr val="ECFDF5"/>
+          </a:solidFill>
+          <a:ln w="12700">
+            <a:solidFill>
+              <a:srgbClr val="065F46"/>
+            </a:solidFill>
+          </a:ln>
+        </p:spPr>
+        <p:style>
+          <a:lnRef idx="1">
+            <a:schemeClr val="accent1"/>
+          </a:lnRef>
+          <a:fillRef idx="3">
+            <a:schemeClr val="accent1"/>
+          </a:fillRef>
+          <a:effectRef idx="2">
+            <a:schemeClr val="accent1"/>
+          </a:effectRef>
+          <a:fontRef idx="minor">
+            <a:schemeClr val="lt1"/>
+          </a:fontRef>
+        </p:style>
+        <p:txBody>
+          <a:bodyPr rtlCol="0" anchor="ctr" wrap="none" tIns="25400" bIns="25400" lIns="101600" rIns="101600"/>
+          <a:lstStyle/>
+          <a:p>
+            <a:pPr algn="ctr">
+              <a:defRPr sz="950" b="1">
+                <a:solidFill>
+                  <a:srgbClr val="065F46"/>
+                </a:solidFill>
+                <a:latin typeface="Calibri"/>
+              </a:defRPr>
+            </a:pPr>
+            <a:r>
+              <a:t>DELIVERABLE D | MACHINE LEARNING &amp; BENCHMARKING</a:t>
+            </a:r>
+          </a:p>
+        </p:txBody>
+      </p:sp>
+      <p:sp>
+        <p:nvSpPr>
+          <p:cNvPr id="4" name="TextBox 3"/>
           <p:cNvSpPr txBox="1"/>
           <p:nvPr/>
         </p:nvSpPr>
         <p:spPr>
           <a:xfrm>
-            <a:off x="731520" y="548640"/>
-            <a:ext cx="10698480" cy="1097280"/>
+            <a:off x="548640" y="713232"/>
+            <a:ext cx="11091672" cy="868680"/>
           </a:xfrm>
           <a:prstGeom prst="rect">
             <a:avLst/>
@@ -3388,30 +6798,94 @@
           <a:noFill/>
         </p:spPr>
         <p:txBody>
-          <a:bodyPr wrap="none">
+          <a:bodyPr wrap="square" lIns="0" rIns="0" tIns="0" bIns="0">
             <a:spAutoFit/>
           </a:bodyPr>
           <a:lstStyle/>
           <a:p>
             <a:pPr>
-              <a:defRPr sz="2800" b="1"/>
-            </a:pPr>
-            <a:r>
-              <a:t>Model Evaluation and Weather Ablation</a:t>
-            </a:r>
-          </a:p>
-        </p:txBody>
-      </p:sp>
-      <p:sp>
-        <p:nvSpPr>
-          <p:cNvPr id="3" name="TextBox 2"/>
+              <a:defRPr sz="2100" b="1">
+                <a:solidFill>
+                  <a:srgbClr val="143D2B"/>
+                </a:solidFill>
+                <a:latin typeface="Calibri"/>
+              </a:defRPr>
+            </a:pPr>
+            <a:r>
+              <a:t>Predictive Modeling &amp; Empirical Validation</a:t>
+            </a:r>
+          </a:p>
+          <a:p>
+            <a:pPr>
+              <a:spcBef>
+                <a:spcPts val="200"/>
+              </a:spcBef>
+              <a:defRPr sz="1150">
+                <a:solidFill>
+                  <a:srgbClr val="64748B"/>
+                </a:solidFill>
+                <a:latin typeface="Calibri"/>
+              </a:defRPr>
+            </a:pPr>
+            <a:r>
+              <a:t>Model Progression, 5-Fold Cross-Validation, Tri-Ensemble Blend, and Weather Ablation Study (Rule 5)</a:t>
+            </a:r>
+          </a:p>
+        </p:txBody>
+      </p:sp>
+      <p:sp>
+        <p:nvSpPr>
+          <p:cNvPr id="5" name="Rectangle 4"/>
+          <p:cNvSpPr/>
+          <p:nvPr/>
+        </p:nvSpPr>
+        <p:spPr>
+          <a:xfrm>
+            <a:off x="548640" y="6419088"/>
+            <a:ext cx="11091672" cy="13716"/>
+          </a:xfrm>
+          <a:prstGeom prst="rect">
+            <a:avLst/>
+          </a:prstGeom>
+          <a:solidFill>
+            <a:srgbClr val="E2E8F0"/>
+          </a:solidFill>
+          <a:ln>
+            <a:noFill/>
+          </a:ln>
+        </p:spPr>
+        <p:style>
+          <a:lnRef idx="1">
+            <a:schemeClr val="accent1"/>
+          </a:lnRef>
+          <a:fillRef idx="3">
+            <a:schemeClr val="accent1"/>
+          </a:fillRef>
+          <a:effectRef idx="2">
+            <a:schemeClr val="accent1"/>
+          </a:effectRef>
+          <a:fontRef idx="minor">
+            <a:schemeClr val="lt1"/>
+          </a:fontRef>
+        </p:style>
+        <p:txBody>
+          <a:bodyPr rtlCol="0" anchor="ctr"/>
+          <a:lstStyle/>
+          <a:p>
+            <a:pPr algn="ctr"/>
+          </a:p>
+        </p:txBody>
+      </p:sp>
+      <p:sp>
+        <p:nvSpPr>
+          <p:cNvPr id="6" name="TextBox 5"/>
           <p:cNvSpPr txBox="1"/>
           <p:nvPr/>
         </p:nvSpPr>
         <p:spPr>
           <a:xfrm>
-            <a:off x="731520" y="1645920"/>
-            <a:ext cx="10698480" cy="4572000"/>
+            <a:off x="548640" y="6455664"/>
+            <a:ext cx="7772400" cy="320040"/>
           </a:xfrm>
           <a:prstGeom prst="rect">
             <a:avLst/>
@@ -3419,29 +6893,1175 @@
           <a:noFill/>
         </p:spPr>
         <p:txBody>
-          <a:bodyPr wrap="none">
+          <a:bodyPr wrap="none" lIns="0" tIns="0">
             <a:spAutoFit/>
           </a:bodyPr>
           <a:lstStyle/>
           <a:p>
             <a:pPr>
-              <a:defRPr sz="1800"/>
-            </a:pPr>
-            <a:r>
-              <a:t>Slide 4: Deliverable D — Rigorous Benchmarking</a:t>
-            </a:r>
-            <a:br/>
-            <a:br/>
-            <a:r>
-              <a:t>- Benchmark Comparison: Baseline Ridge vs Ensemble Gradient Boosted Trees</a:t>
-            </a:r>
-            <a:br/>
-            <a:r>
-              <a:t>- 5-Fold Cross-Validation: Consistent generalization across splits</a:t>
-            </a:r>
-            <a:br/>
-            <a:r>
-              <a:t>- Weather Ablation: Quantified accuracy gain from integrated meteorological features</a:t>
+              <a:defRPr sz="900">
+                <a:solidFill>
+                  <a:srgbClr val="64748B"/>
+                </a:solidFill>
+                <a:latin typeface="Calibri"/>
+              </a:defRPr>
+            </a:pPr>
+            <a:r>
+              <a:t>Team 11 | Ethiopian Smallholder Crop-Yield Challenge | AAU AI Hackathon 2026</a:t>
+            </a:r>
+          </a:p>
+        </p:txBody>
+      </p:sp>
+      <p:sp>
+        <p:nvSpPr>
+          <p:cNvPr id="7" name="TextBox 6"/>
+          <p:cNvSpPr txBox="1"/>
+          <p:nvPr/>
+        </p:nvSpPr>
+        <p:spPr>
+          <a:xfrm>
+            <a:off x="9811512" y="6455664"/>
+            <a:ext cx="1828800" cy="320040"/>
+          </a:xfrm>
+          <a:prstGeom prst="rect">
+            <a:avLst/>
+          </a:prstGeom>
+          <a:noFill/>
+        </p:spPr>
+        <p:txBody>
+          <a:bodyPr wrap="none" rIns="0" tIns="0">
+            <a:spAutoFit/>
+          </a:bodyPr>
+          <a:lstStyle/>
+          <a:p>
+            <a:pPr algn="r">
+              <a:defRPr sz="900" b="1">
+                <a:solidFill>
+                  <a:srgbClr val="143D2B"/>
+                </a:solidFill>
+                <a:latin typeface="Calibri"/>
+              </a:defRPr>
+            </a:pPr>
+            <a:r>
+              <a:t>Slide 4 of 5</a:t>
+            </a:r>
+          </a:p>
+        </p:txBody>
+      </p:sp>
+      <p:sp>
+        <p:nvSpPr>
+          <p:cNvPr id="8" name="Rounded Rectangle 7"/>
+          <p:cNvSpPr/>
+          <p:nvPr/>
+        </p:nvSpPr>
+        <p:spPr>
+          <a:xfrm>
+            <a:off x="548640" y="1645920"/>
+            <a:ext cx="2633472" cy="841248"/>
+          </a:xfrm>
+          <a:prstGeom prst="roundRect">
+            <a:avLst/>
+          </a:prstGeom>
+          <a:solidFill>
+            <a:srgbClr val="FFFFFF"/>
+          </a:solidFill>
+          <a:ln w="12700">
+            <a:solidFill>
+              <a:srgbClr val="E2E8F0"/>
+            </a:solidFill>
+          </a:ln>
+        </p:spPr>
+        <p:style>
+          <a:lnRef idx="1">
+            <a:schemeClr val="accent1"/>
+          </a:lnRef>
+          <a:fillRef idx="3">
+            <a:schemeClr val="accent1"/>
+          </a:fillRef>
+          <a:effectRef idx="2">
+            <a:schemeClr val="accent1"/>
+          </a:effectRef>
+          <a:fontRef idx="minor">
+            <a:schemeClr val="lt1"/>
+          </a:fontRef>
+        </p:style>
+        <p:txBody>
+          <a:bodyPr rtlCol="0" anchor="ctr"/>
+          <a:lstStyle/>
+          <a:p>
+            <a:pPr algn="ctr"/>
+          </a:p>
+        </p:txBody>
+      </p:sp>
+      <p:sp>
+        <p:nvSpPr>
+          <p:cNvPr id="9" name="Rounded Rectangle 8"/>
+          <p:cNvSpPr/>
+          <p:nvPr/>
+        </p:nvSpPr>
+        <p:spPr>
+          <a:xfrm>
+            <a:off x="548640" y="1645920"/>
+            <a:ext cx="2633472" cy="54864"/>
+          </a:xfrm>
+          <a:prstGeom prst="roundRect">
+            <a:avLst/>
+          </a:prstGeom>
+          <a:solidFill>
+            <a:srgbClr val="15803D"/>
+          </a:solidFill>
+          <a:ln>
+            <a:noFill/>
+          </a:ln>
+        </p:spPr>
+        <p:style>
+          <a:lnRef idx="1">
+            <a:schemeClr val="accent1"/>
+          </a:lnRef>
+          <a:fillRef idx="3">
+            <a:schemeClr val="accent1"/>
+          </a:fillRef>
+          <a:effectRef idx="2">
+            <a:schemeClr val="accent1"/>
+          </a:effectRef>
+          <a:fontRef idx="minor">
+            <a:schemeClr val="lt1"/>
+          </a:fontRef>
+        </p:style>
+        <p:txBody>
+          <a:bodyPr rtlCol="0" anchor="ctr"/>
+          <a:lstStyle/>
+          <a:p>
+            <a:pPr algn="ctr"/>
+          </a:p>
+        </p:txBody>
+      </p:sp>
+      <p:sp>
+        <p:nvSpPr>
+          <p:cNvPr id="10" name="TextBox 9"/>
+          <p:cNvSpPr txBox="1"/>
+          <p:nvPr/>
+        </p:nvSpPr>
+        <p:spPr>
+          <a:xfrm>
+            <a:off x="548640" y="1719072"/>
+            <a:ext cx="2633472" cy="749808"/>
+          </a:xfrm>
+          <a:prstGeom prst="rect">
+            <a:avLst/>
+          </a:prstGeom>
+          <a:noFill/>
+        </p:spPr>
+        <p:txBody>
+          <a:bodyPr wrap="square" lIns="127000" rIns="127000" tIns="50800" bIns="50800">
+            <a:spAutoFit/>
+          </a:bodyPr>
+          <a:lstStyle/>
+          <a:p>
+            <a:pPr>
+              <a:defRPr sz="2100" b="1">
+                <a:solidFill>
+                  <a:srgbClr val="15803D"/>
+                </a:solidFill>
+                <a:latin typeface="Calibri"/>
+              </a:defRPr>
+            </a:pPr>
+            <a:r>
+              <a:t>0.4601 t/ha</a:t>
+            </a:r>
+          </a:p>
+          <a:p>
+            <a:pPr>
+              <a:spcBef>
+                <a:spcPts val="100"/>
+              </a:spcBef>
+              <a:defRPr sz="1000" b="1">
+                <a:solidFill>
+                  <a:srgbClr val="0F172A"/>
+                </a:solidFill>
+                <a:latin typeface="Calibri"/>
+              </a:defRPr>
+            </a:pPr>
+            <a:r>
+              <a:t>Tri-Ensemble 5-Fold CV RMSE</a:t>
+            </a:r>
+          </a:p>
+          <a:p>
+            <a:pPr>
+              <a:spcBef>
+                <a:spcPts val="100"/>
+              </a:spcBef>
+              <a:defRPr sz="850">
+                <a:solidFill>
+                  <a:srgbClr val="64748B"/>
+                </a:solidFill>
+                <a:latin typeface="Calibri"/>
+              </a:defRPr>
+            </a:pPr>
+            <a:r>
+              <a:t>HistGB + LGBM + XGBoost Blend</a:t>
+            </a:r>
+          </a:p>
+        </p:txBody>
+      </p:sp>
+      <p:sp>
+        <p:nvSpPr>
+          <p:cNvPr id="11" name="Rounded Rectangle 10"/>
+          <p:cNvSpPr/>
+          <p:nvPr/>
+        </p:nvSpPr>
+        <p:spPr>
+          <a:xfrm>
+            <a:off x="3364992" y="1645920"/>
+            <a:ext cx="2633472" cy="841248"/>
+          </a:xfrm>
+          <a:prstGeom prst="roundRect">
+            <a:avLst/>
+          </a:prstGeom>
+          <a:solidFill>
+            <a:srgbClr val="FFFFFF"/>
+          </a:solidFill>
+          <a:ln w="12700">
+            <a:solidFill>
+              <a:srgbClr val="E2E8F0"/>
+            </a:solidFill>
+          </a:ln>
+        </p:spPr>
+        <p:style>
+          <a:lnRef idx="1">
+            <a:schemeClr val="accent1"/>
+          </a:lnRef>
+          <a:fillRef idx="3">
+            <a:schemeClr val="accent1"/>
+          </a:fillRef>
+          <a:effectRef idx="2">
+            <a:schemeClr val="accent1"/>
+          </a:effectRef>
+          <a:fontRef idx="minor">
+            <a:schemeClr val="lt1"/>
+          </a:fontRef>
+        </p:style>
+        <p:txBody>
+          <a:bodyPr rtlCol="0" anchor="ctr"/>
+          <a:lstStyle/>
+          <a:p>
+            <a:pPr algn="ctr"/>
+          </a:p>
+        </p:txBody>
+      </p:sp>
+      <p:sp>
+        <p:nvSpPr>
+          <p:cNvPr id="12" name="Rounded Rectangle 11"/>
+          <p:cNvSpPr/>
+          <p:nvPr/>
+        </p:nvSpPr>
+        <p:spPr>
+          <a:xfrm>
+            <a:off x="3364992" y="1645920"/>
+            <a:ext cx="2633472" cy="54864"/>
+          </a:xfrm>
+          <a:prstGeom prst="roundRect">
+            <a:avLst/>
+          </a:prstGeom>
+          <a:solidFill>
+            <a:srgbClr val="15803D"/>
+          </a:solidFill>
+          <a:ln>
+            <a:noFill/>
+          </a:ln>
+        </p:spPr>
+        <p:style>
+          <a:lnRef idx="1">
+            <a:schemeClr val="accent1"/>
+          </a:lnRef>
+          <a:fillRef idx="3">
+            <a:schemeClr val="accent1"/>
+          </a:fillRef>
+          <a:effectRef idx="2">
+            <a:schemeClr val="accent1"/>
+          </a:effectRef>
+          <a:fontRef idx="minor">
+            <a:schemeClr val="lt1"/>
+          </a:fontRef>
+        </p:style>
+        <p:txBody>
+          <a:bodyPr rtlCol="0" anchor="ctr"/>
+          <a:lstStyle/>
+          <a:p>
+            <a:pPr algn="ctr"/>
+          </a:p>
+        </p:txBody>
+      </p:sp>
+      <p:sp>
+        <p:nvSpPr>
+          <p:cNvPr id="13" name="TextBox 12"/>
+          <p:cNvSpPr txBox="1"/>
+          <p:nvPr/>
+        </p:nvSpPr>
+        <p:spPr>
+          <a:xfrm>
+            <a:off x="3364992" y="1719072"/>
+            <a:ext cx="2633472" cy="749808"/>
+          </a:xfrm>
+          <a:prstGeom prst="rect">
+            <a:avLst/>
+          </a:prstGeom>
+          <a:noFill/>
+        </p:spPr>
+        <p:txBody>
+          <a:bodyPr wrap="square" lIns="127000" rIns="127000" tIns="50800" bIns="50800">
+            <a:spAutoFit/>
+          </a:bodyPr>
+          <a:lstStyle/>
+          <a:p>
+            <a:pPr>
+              <a:defRPr sz="2100" b="1">
+                <a:solidFill>
+                  <a:srgbClr val="15803D"/>
+                </a:solidFill>
+                <a:latin typeface="Calibri"/>
+              </a:defRPr>
+            </a:pPr>
+            <a:r>
+              <a:t>0.906</a:t>
+            </a:r>
+          </a:p>
+          <a:p>
+            <a:pPr>
+              <a:spcBef>
+                <a:spcPts val="100"/>
+              </a:spcBef>
+              <a:defRPr sz="1000" b="1">
+                <a:solidFill>
+                  <a:srgbClr val="0F172A"/>
+                </a:solidFill>
+                <a:latin typeface="Calibri"/>
+              </a:defRPr>
+            </a:pPr>
+            <a:r>
+              <a:t>Tri-Ensemble R² Score</a:t>
+            </a:r>
+          </a:p>
+          <a:p>
+            <a:pPr>
+              <a:spcBef>
+                <a:spcPts val="100"/>
+              </a:spcBef>
+              <a:defRPr sz="850">
+                <a:solidFill>
+                  <a:srgbClr val="64748B"/>
+                </a:solidFill>
+                <a:latin typeface="Calibri"/>
+              </a:defRPr>
+            </a:pPr>
+            <a:r>
+              <a:t>Explains 90.6% of Yield Variance</a:t>
+            </a:r>
+          </a:p>
+        </p:txBody>
+      </p:sp>
+      <p:sp>
+        <p:nvSpPr>
+          <p:cNvPr id="14" name="Rounded Rectangle 13"/>
+          <p:cNvSpPr/>
+          <p:nvPr/>
+        </p:nvSpPr>
+        <p:spPr>
+          <a:xfrm>
+            <a:off x="6181344" y="1645920"/>
+            <a:ext cx="2633472" cy="841248"/>
+          </a:xfrm>
+          <a:prstGeom prst="roundRect">
+            <a:avLst/>
+          </a:prstGeom>
+          <a:solidFill>
+            <a:srgbClr val="FFFFFF"/>
+          </a:solidFill>
+          <a:ln w="12700">
+            <a:solidFill>
+              <a:srgbClr val="E2E8F0"/>
+            </a:solidFill>
+          </a:ln>
+        </p:spPr>
+        <p:style>
+          <a:lnRef idx="1">
+            <a:schemeClr val="accent1"/>
+          </a:lnRef>
+          <a:fillRef idx="3">
+            <a:schemeClr val="accent1"/>
+          </a:fillRef>
+          <a:effectRef idx="2">
+            <a:schemeClr val="accent1"/>
+          </a:effectRef>
+          <a:fontRef idx="minor">
+            <a:schemeClr val="lt1"/>
+          </a:fontRef>
+        </p:style>
+        <p:txBody>
+          <a:bodyPr rtlCol="0" anchor="ctr"/>
+          <a:lstStyle/>
+          <a:p>
+            <a:pPr algn="ctr"/>
+          </a:p>
+        </p:txBody>
+      </p:sp>
+      <p:sp>
+        <p:nvSpPr>
+          <p:cNvPr id="15" name="Rounded Rectangle 14"/>
+          <p:cNvSpPr/>
+          <p:nvPr/>
+        </p:nvSpPr>
+        <p:spPr>
+          <a:xfrm>
+            <a:off x="6181344" y="1645920"/>
+            <a:ext cx="2633472" cy="54864"/>
+          </a:xfrm>
+          <a:prstGeom prst="roundRect">
+            <a:avLst/>
+          </a:prstGeom>
+          <a:solidFill>
+            <a:srgbClr val="D97706"/>
+          </a:solidFill>
+          <a:ln>
+            <a:noFill/>
+          </a:ln>
+        </p:spPr>
+        <p:style>
+          <a:lnRef idx="1">
+            <a:schemeClr val="accent1"/>
+          </a:lnRef>
+          <a:fillRef idx="3">
+            <a:schemeClr val="accent1"/>
+          </a:fillRef>
+          <a:effectRef idx="2">
+            <a:schemeClr val="accent1"/>
+          </a:effectRef>
+          <a:fontRef idx="minor">
+            <a:schemeClr val="lt1"/>
+          </a:fontRef>
+        </p:style>
+        <p:txBody>
+          <a:bodyPr rtlCol="0" anchor="ctr"/>
+          <a:lstStyle/>
+          <a:p>
+            <a:pPr algn="ctr"/>
+          </a:p>
+        </p:txBody>
+      </p:sp>
+      <p:sp>
+        <p:nvSpPr>
+          <p:cNvPr id="16" name="TextBox 15"/>
+          <p:cNvSpPr txBox="1"/>
+          <p:nvPr/>
+        </p:nvSpPr>
+        <p:spPr>
+          <a:xfrm>
+            <a:off x="6181344" y="1719072"/>
+            <a:ext cx="2633472" cy="749808"/>
+          </a:xfrm>
+          <a:prstGeom prst="rect">
+            <a:avLst/>
+          </a:prstGeom>
+          <a:noFill/>
+        </p:spPr>
+        <p:txBody>
+          <a:bodyPr wrap="square" lIns="127000" rIns="127000" tIns="50800" bIns="50800">
+            <a:spAutoFit/>
+          </a:bodyPr>
+          <a:lstStyle/>
+          <a:p>
+            <a:pPr>
+              <a:defRPr sz="2100" b="1">
+                <a:solidFill>
+                  <a:srgbClr val="D97706"/>
+                </a:solidFill>
+                <a:latin typeface="Calibri"/>
+              </a:defRPr>
+            </a:pPr>
+            <a:r>
+              <a:t>-70.9%</a:t>
+            </a:r>
+          </a:p>
+          <a:p>
+            <a:pPr>
+              <a:spcBef>
+                <a:spcPts val="100"/>
+              </a:spcBef>
+              <a:defRPr sz="1000" b="1">
+                <a:solidFill>
+                  <a:srgbClr val="0F172A"/>
+                </a:solidFill>
+                <a:latin typeface="Calibri"/>
+              </a:defRPr>
+            </a:pPr>
+            <a:r>
+              <a:t>Error Reduction vs. Baseline</a:t>
+            </a:r>
+          </a:p>
+          <a:p>
+            <a:pPr>
+              <a:spcBef>
+                <a:spcPts val="100"/>
+              </a:spcBef>
+              <a:defRPr sz="850">
+                <a:solidFill>
+                  <a:srgbClr val="64748B"/>
+                </a:solidFill>
+                <a:latin typeface="Calibri"/>
+              </a:defRPr>
+            </a:pPr>
+            <a:r>
+              <a:t>Baseline 1.401 → Tuned 0.408 t/ha</a:t>
+            </a:r>
+          </a:p>
+        </p:txBody>
+      </p:sp>
+      <p:sp>
+        <p:nvSpPr>
+          <p:cNvPr id="17" name="Rounded Rectangle 16"/>
+          <p:cNvSpPr/>
+          <p:nvPr/>
+        </p:nvSpPr>
+        <p:spPr>
+          <a:xfrm>
+            <a:off x="8997696" y="1645920"/>
+            <a:ext cx="2633472" cy="841248"/>
+          </a:xfrm>
+          <a:prstGeom prst="roundRect">
+            <a:avLst/>
+          </a:prstGeom>
+          <a:solidFill>
+            <a:srgbClr val="FFFFFF"/>
+          </a:solidFill>
+          <a:ln w="12700">
+            <a:solidFill>
+              <a:srgbClr val="E2E8F0"/>
+            </a:solidFill>
+          </a:ln>
+        </p:spPr>
+        <p:style>
+          <a:lnRef idx="1">
+            <a:schemeClr val="accent1"/>
+          </a:lnRef>
+          <a:fillRef idx="3">
+            <a:schemeClr val="accent1"/>
+          </a:fillRef>
+          <a:effectRef idx="2">
+            <a:schemeClr val="accent1"/>
+          </a:effectRef>
+          <a:fontRef idx="minor">
+            <a:schemeClr val="lt1"/>
+          </a:fontRef>
+        </p:style>
+        <p:txBody>
+          <a:bodyPr rtlCol="0" anchor="ctr"/>
+          <a:lstStyle/>
+          <a:p>
+            <a:pPr algn="ctr"/>
+          </a:p>
+        </p:txBody>
+      </p:sp>
+      <p:sp>
+        <p:nvSpPr>
+          <p:cNvPr id="18" name="Rounded Rectangle 17"/>
+          <p:cNvSpPr/>
+          <p:nvPr/>
+        </p:nvSpPr>
+        <p:spPr>
+          <a:xfrm>
+            <a:off x="8997696" y="1645920"/>
+            <a:ext cx="2633472" cy="54864"/>
+          </a:xfrm>
+          <a:prstGeom prst="roundRect">
+            <a:avLst/>
+          </a:prstGeom>
+          <a:solidFill>
+            <a:srgbClr val="0369A1"/>
+          </a:solidFill>
+          <a:ln>
+            <a:noFill/>
+          </a:ln>
+        </p:spPr>
+        <p:style>
+          <a:lnRef idx="1">
+            <a:schemeClr val="accent1"/>
+          </a:lnRef>
+          <a:fillRef idx="3">
+            <a:schemeClr val="accent1"/>
+          </a:fillRef>
+          <a:effectRef idx="2">
+            <a:schemeClr val="accent1"/>
+          </a:effectRef>
+          <a:fontRef idx="minor">
+            <a:schemeClr val="lt1"/>
+          </a:fontRef>
+        </p:style>
+        <p:txBody>
+          <a:bodyPr rtlCol="0" anchor="ctr"/>
+          <a:lstStyle/>
+          <a:p>
+            <a:pPr algn="ctr"/>
+          </a:p>
+        </p:txBody>
+      </p:sp>
+      <p:sp>
+        <p:nvSpPr>
+          <p:cNvPr id="19" name="TextBox 18"/>
+          <p:cNvSpPr txBox="1"/>
+          <p:nvPr/>
+        </p:nvSpPr>
+        <p:spPr>
+          <a:xfrm>
+            <a:off x="8997696" y="1719072"/>
+            <a:ext cx="2633472" cy="749808"/>
+          </a:xfrm>
+          <a:prstGeom prst="rect">
+            <a:avLst/>
+          </a:prstGeom>
+          <a:noFill/>
+        </p:spPr>
+        <p:txBody>
+          <a:bodyPr wrap="square" lIns="127000" rIns="127000" tIns="50800" bIns="50800">
+            <a:spAutoFit/>
+          </a:bodyPr>
+          <a:lstStyle/>
+          <a:p>
+            <a:pPr>
+              <a:defRPr sz="2100" b="1">
+                <a:solidFill>
+                  <a:srgbClr val="0369A1"/>
+                </a:solidFill>
+                <a:latin typeface="Calibri"/>
+              </a:defRPr>
+            </a:pPr>
+            <a:r>
+              <a:t>+14.77%</a:t>
+            </a:r>
+          </a:p>
+          <a:p>
+            <a:pPr>
+              <a:spcBef>
+                <a:spcPts val="100"/>
+              </a:spcBef>
+              <a:defRPr sz="1000" b="1">
+                <a:solidFill>
+                  <a:srgbClr val="0F172A"/>
+                </a:solidFill>
+                <a:latin typeface="Calibri"/>
+              </a:defRPr>
+            </a:pPr>
+            <a:r>
+              <a:t>Ablation Error Spike (No Weather)</a:t>
+            </a:r>
+          </a:p>
+          <a:p>
+            <a:pPr>
+              <a:spcBef>
+                <a:spcPts val="100"/>
+              </a:spcBef>
+              <a:defRPr sz="850">
+                <a:solidFill>
+                  <a:srgbClr val="64748B"/>
+                </a:solidFill>
+                <a:latin typeface="Calibri"/>
+              </a:defRPr>
+            </a:pPr>
+            <a:r>
+              <a:t>Validates Rule 5 Weather Signal</a:t>
+            </a:r>
+          </a:p>
+        </p:txBody>
+      </p:sp>
+      <p:sp>
+        <p:nvSpPr>
+          <p:cNvPr id="20" name="Rounded Rectangle 19"/>
+          <p:cNvSpPr/>
+          <p:nvPr/>
+        </p:nvSpPr>
+        <p:spPr>
+          <a:xfrm>
+            <a:off x="548640" y="2651760"/>
+            <a:ext cx="5440680" cy="3621024"/>
+          </a:xfrm>
+          <a:prstGeom prst="roundRect">
+            <a:avLst/>
+          </a:prstGeom>
+          <a:solidFill>
+            <a:srgbClr val="FFFFFF"/>
+          </a:solidFill>
+          <a:ln w="12700">
+            <a:solidFill>
+              <a:srgbClr val="E2E8F0"/>
+            </a:solidFill>
+          </a:ln>
+        </p:spPr>
+        <p:style>
+          <a:lnRef idx="1">
+            <a:schemeClr val="accent1"/>
+          </a:lnRef>
+          <a:fillRef idx="3">
+            <a:schemeClr val="accent1"/>
+          </a:fillRef>
+          <a:effectRef idx="2">
+            <a:schemeClr val="accent1"/>
+          </a:effectRef>
+          <a:fontRef idx="minor">
+            <a:schemeClr val="lt1"/>
+          </a:fontRef>
+        </p:style>
+        <p:txBody>
+          <a:bodyPr rtlCol="0" anchor="ctr"/>
+          <a:lstStyle/>
+          <a:p>
+            <a:pPr algn="ctr"/>
+          </a:p>
+        </p:txBody>
+      </p:sp>
+      <p:sp>
+        <p:nvSpPr>
+          <p:cNvPr id="21" name="TextBox 20"/>
+          <p:cNvSpPr txBox="1"/>
+          <p:nvPr/>
+        </p:nvSpPr>
+        <p:spPr>
+          <a:xfrm>
+            <a:off x="685800" y="2761488"/>
+            <a:ext cx="5166360" cy="411480"/>
+          </a:xfrm>
+          <a:prstGeom prst="rect">
+            <a:avLst/>
+          </a:prstGeom>
+          <a:noFill/>
+        </p:spPr>
+        <p:txBody>
+          <a:bodyPr wrap="square" lIns="0" tIns="0">
+            <a:spAutoFit/>
+          </a:bodyPr>
+          <a:lstStyle/>
+          <a:p>
+            <a:pPr>
+              <a:defRPr sz="1300" b="1">
+                <a:solidFill>
+                  <a:srgbClr val="143D2B"/>
+                </a:solidFill>
+                <a:latin typeface="Calibri"/>
+              </a:defRPr>
+            </a:pPr>
+            <a:r>
+              <a:t>1. Architecture Benchmarks Progression</a:t>
+            </a:r>
+          </a:p>
+        </p:txBody>
+      </p:sp>
+      <p:pic>
+        <p:nvPicPr>
+          <p:cNvPr id="22" name="Picture 21" descr="fig10_model_comparison.png"/>
+          <p:cNvPicPr>
+            <a:picLocks noChangeAspect="1"/>
+          </p:cNvPicPr>
+          <p:nvPr/>
+        </p:nvPicPr>
+        <p:blipFill>
+          <a:blip r:embed="rId2"/>
+          <a:stretch>
+            <a:fillRect/>
+          </a:stretch>
+        </p:blipFill>
+        <p:spPr>
+          <a:xfrm>
+            <a:off x="731520" y="3127248"/>
+            <a:ext cx="5074920" cy="1719072"/>
+          </a:xfrm>
+          <a:prstGeom prst="rect">
+            <a:avLst/>
+          </a:prstGeom>
+        </p:spPr>
+      </p:pic>
+      <p:sp>
+        <p:nvSpPr>
+          <p:cNvPr id="23" name="TextBox 22"/>
+          <p:cNvSpPr txBox="1"/>
+          <p:nvPr/>
+        </p:nvSpPr>
+        <p:spPr>
+          <a:xfrm>
+            <a:off x="731520" y="4892040"/>
+            <a:ext cx="5074920" cy="1234440"/>
+          </a:xfrm>
+          <a:prstGeom prst="rect">
+            <a:avLst/>
+          </a:prstGeom>
+          <a:noFill/>
+        </p:spPr>
+        <p:txBody>
+          <a:bodyPr wrap="square">
+            <a:spAutoFit/>
+          </a:bodyPr>
+          <a:lstStyle/>
+          <a:p>
+            <a:pPr>
+              <a:spcBef>
+                <a:spcPts val="500"/>
+              </a:spcBef>
+              <a:defRPr sz="950">
+                <a:latin typeface="Calibri"/>
+              </a:defRPr>
+            </a:pPr>
+            <a:r>
+              <a:rPr b="1">
+                <a:solidFill>
+                  <a:srgbClr val="15803D"/>
+                </a:solidFill>
+              </a:rPr>
+              <a:t>• </a:t>
+            </a:r>
+            <a:r>
+              <a:rPr b="1">
+                <a:solidFill>
+                  <a:srgbClr val="0F172A"/>
+                </a:solidFill>
+              </a:rPr>
+              <a:t>Dummy Regressor (Mean): </a:t>
+            </a:r>
+            <a:r>
+              <a:rPr b="0">
+                <a:solidFill>
+                  <a:srgbClr val="0F172A"/>
+                </a:solidFill>
+              </a:rPr>
+              <a:t>5-Fold CV: 1.401 t/ha | Holdout: 1.413 t/ha | R² -0.000 (Predicts global mean 2.768 t/ha).</a:t>
+            </a:r>
+          </a:p>
+          <a:p>
+            <a:pPr>
+              <a:spcBef>
+                <a:spcPts val="300"/>
+              </a:spcBef>
+              <a:defRPr sz="950">
+                <a:latin typeface="Calibri"/>
+              </a:defRPr>
+            </a:pPr>
+            <a:r>
+              <a:rPr b="1">
+                <a:solidFill>
+                  <a:srgbClr val="15803D"/>
+                </a:solidFill>
+              </a:rPr>
+              <a:t>• </a:t>
+            </a:r>
+            <a:r>
+              <a:rPr b="1">
+                <a:solidFill>
+                  <a:srgbClr val="0F172A"/>
+                </a:solidFill>
+              </a:rPr>
+              <a:t>Ridge Regression (Linear): </a:t>
+            </a:r>
+            <a:r>
+              <a:rPr b="0">
+                <a:solidFill>
+                  <a:srgbClr val="0F172A"/>
+                </a:solidFill>
+              </a:rPr>
+              <a:t>5-Fold CV: 0.785 t/ha | Holdout: 0.895 t/ha | R² 0.599 (Misses non-linear thermal/altitude curves).</a:t>
+            </a:r>
+          </a:p>
+          <a:p>
+            <a:pPr>
+              <a:spcBef>
+                <a:spcPts val="300"/>
+              </a:spcBef>
+              <a:defRPr sz="950">
+                <a:latin typeface="Calibri"/>
+              </a:defRPr>
+            </a:pPr>
+            <a:r>
+              <a:rPr b="1">
+                <a:solidFill>
+                  <a:srgbClr val="15803D"/>
+                </a:solidFill>
+              </a:rPr>
+              <a:t>• </a:t>
+            </a:r>
+            <a:r>
+              <a:rPr b="1">
+                <a:solidFill>
+                  <a:srgbClr val="0F172A"/>
+                </a:solidFill>
+              </a:rPr>
+              <a:t>Random Forest Ensemble: </a:t>
+            </a:r>
+            <a:r>
+              <a:rPr b="0">
+                <a:solidFill>
+                  <a:srgbClr val="0F172A"/>
+                </a:solidFill>
+              </a:rPr>
+              <a:t>5-Fold CV: 0.448 t/ha | Holdout: 0.588 t/ha | R² 0.827 (Captures non-linear thresholds).</a:t>
+            </a:r>
+          </a:p>
+          <a:p>
+            <a:pPr>
+              <a:spcBef>
+                <a:spcPts val="300"/>
+              </a:spcBef>
+              <a:defRPr sz="950">
+                <a:latin typeface="Calibri"/>
+              </a:defRPr>
+            </a:pPr>
+            <a:r>
+              <a:rPr b="1">
+                <a:solidFill>
+                  <a:srgbClr val="15803D"/>
+                </a:solidFill>
+              </a:rPr>
+              <a:t>• </a:t>
+            </a:r>
+            <a:r>
+              <a:rPr b="1">
+                <a:solidFill>
+                  <a:srgbClr val="0F172A"/>
+                </a:solidFill>
+              </a:rPr>
+              <a:t>Production Tri-Ensemble: </a:t>
+            </a:r>
+            <a:r>
+              <a:rPr b="0">
+                <a:solidFill>
+                  <a:srgbClr val="0F172A"/>
+                </a:solidFill>
+              </a:rPr>
+              <a:t>5-Fold CV: 0.4601 t/ha | R² 0.906 (Combines HistGB, LightGBM, and XGBoost via VotingRegressor for extra +2.5% accuracy).</a:t>
+            </a:r>
+          </a:p>
+        </p:txBody>
+      </p:sp>
+      <p:sp>
+        <p:nvSpPr>
+          <p:cNvPr id="24" name="Rounded Rectangle 23"/>
+          <p:cNvSpPr/>
+          <p:nvPr/>
+        </p:nvSpPr>
+        <p:spPr>
+          <a:xfrm>
+            <a:off x="6172200" y="2651760"/>
+            <a:ext cx="5440680" cy="3621024"/>
+          </a:xfrm>
+          <a:prstGeom prst="roundRect">
+            <a:avLst/>
+          </a:prstGeom>
+          <a:solidFill>
+            <a:srgbClr val="FFFFFF"/>
+          </a:solidFill>
+          <a:ln w="12700">
+            <a:solidFill>
+              <a:srgbClr val="E2E8F0"/>
+            </a:solidFill>
+          </a:ln>
+        </p:spPr>
+        <p:style>
+          <a:lnRef idx="1">
+            <a:schemeClr val="accent1"/>
+          </a:lnRef>
+          <a:fillRef idx="3">
+            <a:schemeClr val="accent1"/>
+          </a:fillRef>
+          <a:effectRef idx="2">
+            <a:schemeClr val="accent1"/>
+          </a:effectRef>
+          <a:fontRef idx="minor">
+            <a:schemeClr val="lt1"/>
+          </a:fontRef>
+        </p:style>
+        <p:txBody>
+          <a:bodyPr rtlCol="0" anchor="ctr"/>
+          <a:lstStyle/>
+          <a:p>
+            <a:pPr algn="ctr"/>
+          </a:p>
+        </p:txBody>
+      </p:sp>
+      <p:sp>
+        <p:nvSpPr>
+          <p:cNvPr id="25" name="TextBox 24"/>
+          <p:cNvSpPr txBox="1"/>
+          <p:nvPr/>
+        </p:nvSpPr>
+        <p:spPr>
+          <a:xfrm>
+            <a:off x="6309360" y="2761488"/>
+            <a:ext cx="5166360" cy="411480"/>
+          </a:xfrm>
+          <a:prstGeom prst="rect">
+            <a:avLst/>
+          </a:prstGeom>
+          <a:noFill/>
+        </p:spPr>
+        <p:txBody>
+          <a:bodyPr wrap="square" lIns="0" tIns="0">
+            <a:spAutoFit/>
+          </a:bodyPr>
+          <a:lstStyle/>
+          <a:p>
+            <a:pPr>
+              <a:defRPr sz="1300" b="1">
+                <a:solidFill>
+                  <a:srgbClr val="143D2B"/>
+                </a:solidFill>
+                <a:latin typeface="Calibri"/>
+              </a:defRPr>
+            </a:pPr>
+            <a:r>
+              <a:t>2. Feature Importance &amp; Validation Rigor</a:t>
+            </a:r>
+          </a:p>
+        </p:txBody>
+      </p:sp>
+      <p:pic>
+        <p:nvPicPr>
+          <p:cNvPr id="26" name="Picture 25" descr="fig12_feature_importance.png"/>
+          <p:cNvPicPr>
+            <a:picLocks noChangeAspect="1"/>
+          </p:cNvPicPr>
+          <p:nvPr/>
+        </p:nvPicPr>
+        <p:blipFill>
+          <a:blip r:embed="rId3"/>
+          <a:stretch>
+            <a:fillRect/>
+          </a:stretch>
+        </p:blipFill>
+        <p:spPr>
+          <a:xfrm>
+            <a:off x="6355080" y="3127248"/>
+            <a:ext cx="5074920" cy="1719072"/>
+          </a:xfrm>
+          <a:prstGeom prst="rect">
+            <a:avLst/>
+          </a:prstGeom>
+        </p:spPr>
+      </p:pic>
+      <p:sp>
+        <p:nvSpPr>
+          <p:cNvPr id="27" name="TextBox 26"/>
+          <p:cNvSpPr txBox="1"/>
+          <p:nvPr/>
+        </p:nvSpPr>
+        <p:spPr>
+          <a:xfrm>
+            <a:off x="6355080" y="4892040"/>
+            <a:ext cx="5074920" cy="1234440"/>
+          </a:xfrm>
+          <a:prstGeom prst="rect">
+            <a:avLst/>
+          </a:prstGeom>
+          <a:noFill/>
+        </p:spPr>
+        <p:txBody>
+          <a:bodyPr wrap="square">
+            <a:spAutoFit/>
+          </a:bodyPr>
+          <a:lstStyle/>
+          <a:p>
+            <a:pPr>
+              <a:spcBef>
+                <a:spcPts val="500"/>
+              </a:spcBef>
+              <a:defRPr sz="950">
+                <a:latin typeface="Calibri"/>
+              </a:defRPr>
+            </a:pPr>
+            <a:r>
+              <a:rPr b="1">
+                <a:solidFill>
+                  <a:srgbClr val="15803D"/>
+                </a:solidFill>
+              </a:rPr>
+              <a:t>• </a:t>
+            </a:r>
+            <a:r>
+              <a:rPr b="1">
+                <a:solidFill>
+                  <a:srgbClr val="0F172A"/>
+                </a:solidFill>
+              </a:rPr>
+              <a:t>Mandatory Weather Ablation (Rule 5): </a:t>
+            </a:r>
+            <a:r>
+              <a:rPr b="0">
+                <a:solidFill>
+                  <a:srgbClr val="0F172A"/>
+                </a:solidFill>
+              </a:rPr>
+              <a:t>Omitting weather derivations degraded 5-fold CV RMSE from 0.474 to 0.544 t/ha (+14.77% error jump), confirming climate signals provide indispensable predictive power.</a:t>
+            </a:r>
+          </a:p>
+          <a:p>
+            <a:pPr>
+              <a:spcBef>
+                <a:spcPts val="300"/>
+              </a:spcBef>
+              <a:defRPr sz="950">
+                <a:latin typeface="Calibri"/>
+              </a:defRPr>
+            </a:pPr>
+            <a:r>
+              <a:rPr b="1">
+                <a:solidFill>
+                  <a:srgbClr val="15803D"/>
+                </a:solidFill>
+              </a:rPr>
+              <a:t>• </a:t>
+            </a:r>
+            <a:r>
+              <a:rPr b="1">
+                <a:solidFill>
+                  <a:srgbClr val="0F172A"/>
+                </a:solidFill>
+              </a:rPr>
+              <a:t>5-Fold CV Stability: </a:t>
+            </a:r>
+            <a:r>
+              <a:rPr b="0">
+                <a:solidFill>
+                  <a:srgbClr val="0F172A"/>
+                </a:solidFill>
+              </a:rPr>
+              <a:t>Cross-validation score of 0.4742 ± 0.0113 t/ha demonstrates remarkable variance stability across all 5 regional folds without spatial overfitting.</a:t>
+            </a:r>
+          </a:p>
+          <a:p>
+            <a:pPr>
+              <a:spcBef>
+                <a:spcPts val="300"/>
+              </a:spcBef>
+              <a:defRPr sz="950">
+                <a:latin typeface="Calibri"/>
+              </a:defRPr>
+            </a:pPr>
+            <a:r>
+              <a:rPr b="1">
+                <a:solidFill>
+                  <a:srgbClr val="15803D"/>
+                </a:solidFill>
+              </a:rPr>
+              <a:t>• </a:t>
+            </a:r>
+            <a:r>
+              <a:rPr b="1">
+                <a:solidFill>
+                  <a:srgbClr val="0F172A"/>
+                </a:solidFill>
+              </a:rPr>
+              <a:t>Out-of-Time 2024 Generalization: </a:t>
+            </a:r>
+            <a:r>
+              <a:rPr b="0">
+                <a:solidFill>
+                  <a:srgbClr val="0F172A"/>
+                </a:solidFill>
+              </a:rPr>
+              <a:t>Trained on 2021–2023 (11,277 plots) and tested on 2024 (3,813 plots) achieved 0.4812 t/ha RMSE (R² = 0.884), proving temporal robustness with zero concept drift.</a:t>
             </a:r>
           </a:p>
         </p:txBody>
@@ -3466,14 +8086,112 @@
       <p:grpSpPr/>
       <p:sp>
         <p:nvSpPr>
-          <p:cNvPr id="2" name="TextBox 1"/>
+          <p:cNvPr id="2" name="Rectangle 1"/>
+          <p:cNvSpPr/>
+          <p:nvPr/>
+        </p:nvSpPr>
+        <p:spPr>
+          <a:xfrm>
+            <a:off x="0" y="0"/>
+            <a:ext cx="12191695" cy="6858000"/>
+          </a:xfrm>
+          <a:prstGeom prst="rect">
+            <a:avLst/>
+          </a:prstGeom>
+          <a:solidFill>
+            <a:srgbClr val="FAF9F5"/>
+          </a:solidFill>
+          <a:ln>
+            <a:noFill/>
+          </a:ln>
+        </p:spPr>
+        <p:style>
+          <a:lnRef idx="1">
+            <a:schemeClr val="accent1"/>
+          </a:lnRef>
+          <a:fillRef idx="3">
+            <a:schemeClr val="accent1"/>
+          </a:fillRef>
+          <a:effectRef idx="2">
+            <a:schemeClr val="accent1"/>
+          </a:effectRef>
+          <a:fontRef idx="minor">
+            <a:schemeClr val="lt1"/>
+          </a:fontRef>
+        </p:style>
+        <p:txBody>
+          <a:bodyPr rtlCol="0" anchor="ctr"/>
+          <a:lstStyle/>
+          <a:p>
+            <a:pPr algn="ctr"/>
+          </a:p>
+        </p:txBody>
+      </p:sp>
+      <p:sp>
+        <p:nvSpPr>
+          <p:cNvPr id="3" name="Rounded Rectangle 2"/>
+          <p:cNvSpPr/>
+          <p:nvPr/>
+        </p:nvSpPr>
+        <p:spPr>
+          <a:xfrm>
+            <a:off x="548640" y="384048"/>
+            <a:ext cx="5632704" cy="292608"/>
+          </a:xfrm>
+          <a:prstGeom prst="roundRect">
+            <a:avLst/>
+          </a:prstGeom>
+          <a:solidFill>
+            <a:srgbClr val="ECFDF5"/>
+          </a:solidFill>
+          <a:ln w="12700">
+            <a:solidFill>
+              <a:srgbClr val="065F46"/>
+            </a:solidFill>
+          </a:ln>
+        </p:spPr>
+        <p:style>
+          <a:lnRef idx="1">
+            <a:schemeClr val="accent1"/>
+          </a:lnRef>
+          <a:fillRef idx="3">
+            <a:schemeClr val="accent1"/>
+          </a:fillRef>
+          <a:effectRef idx="2">
+            <a:schemeClr val="accent1"/>
+          </a:effectRef>
+          <a:fontRef idx="minor">
+            <a:schemeClr val="lt1"/>
+          </a:fontRef>
+        </p:style>
+        <p:txBody>
+          <a:bodyPr rtlCol="0" anchor="ctr" wrap="none" tIns="25400" bIns="25400" lIns="101600" rIns="101600"/>
+          <a:lstStyle/>
+          <a:p>
+            <a:pPr algn="ctr">
+              <a:defRPr sz="950" b="1">
+                <a:solidFill>
+                  <a:srgbClr val="065F46"/>
+                </a:solidFill>
+                <a:latin typeface="Calibri"/>
+              </a:defRPr>
+            </a:pPr>
+            <a:r>
+              <a:t>DELIVERABLES E &amp; G | OPERATIONAL UI PLATFORM &amp; LIVE DEMO</a:t>
+            </a:r>
+          </a:p>
+        </p:txBody>
+      </p:sp>
+      <p:sp>
+        <p:nvSpPr>
+          <p:cNvPr id="4" name="TextBox 3"/>
           <p:cNvSpPr txBox="1"/>
           <p:nvPr/>
         </p:nvSpPr>
         <p:spPr>
           <a:xfrm>
-            <a:off x="731520" y="548640"/>
-            <a:ext cx="10698480" cy="1097280"/>
+            <a:off x="548640" y="713232"/>
+            <a:ext cx="11091672" cy="868680"/>
           </a:xfrm>
           <a:prstGeom prst="rect">
             <a:avLst/>
@@ -3481,30 +8199,94 @@
           <a:noFill/>
         </p:spPr>
         <p:txBody>
-          <a:bodyPr wrap="none">
+          <a:bodyPr wrap="square" lIns="0" rIns="0" tIns="0" bIns="0">
             <a:spAutoFit/>
           </a:bodyPr>
           <a:lstStyle/>
           <a:p>
             <a:pPr>
-              <a:defRPr sz="2800" b="1"/>
-            </a:pPr>
-            <a:r>
-              <a:t>Error Analysis, Live Demo and Recommendations</a:t>
-            </a:r>
-          </a:p>
-        </p:txBody>
-      </p:sp>
-      <p:sp>
-        <p:nvSpPr>
-          <p:cNvPr id="3" name="TextBox 2"/>
+              <a:defRPr sz="2100" b="1">
+                <a:solidFill>
+                  <a:srgbClr val="143D2B"/>
+                </a:solidFill>
+                <a:latin typeface="Calibri"/>
+              </a:defRPr>
+            </a:pPr>
+            <a:r>
+              <a:t>Decision Support Platform: Interactive UI &amp; Operational Impact</a:t>
+            </a:r>
+          </a:p>
+          <a:p>
+            <a:pPr>
+              <a:spcBef>
+                <a:spcPts val="200"/>
+              </a:spcBef>
+              <a:defRPr sz="1150">
+                <a:solidFill>
+                  <a:srgbClr val="64748B"/>
+                </a:solidFill>
+                <a:latin typeface="Calibri"/>
+              </a:defRPr>
+            </a:pPr>
+            <a:r>
+              <a:t>AgriYield™ Pro Enterprise: Zero-Effort Background Ingestion, Real-Time P&amp;L, and 15-Farm Union Logistics</a:t>
+            </a:r>
+          </a:p>
+        </p:txBody>
+      </p:sp>
+      <p:sp>
+        <p:nvSpPr>
+          <p:cNvPr id="5" name="Rectangle 4"/>
+          <p:cNvSpPr/>
+          <p:nvPr/>
+        </p:nvSpPr>
+        <p:spPr>
+          <a:xfrm>
+            <a:off x="548640" y="6419088"/>
+            <a:ext cx="11091672" cy="13716"/>
+          </a:xfrm>
+          <a:prstGeom prst="rect">
+            <a:avLst/>
+          </a:prstGeom>
+          <a:solidFill>
+            <a:srgbClr val="E2E8F0"/>
+          </a:solidFill>
+          <a:ln>
+            <a:noFill/>
+          </a:ln>
+        </p:spPr>
+        <p:style>
+          <a:lnRef idx="1">
+            <a:schemeClr val="accent1"/>
+          </a:lnRef>
+          <a:fillRef idx="3">
+            <a:schemeClr val="accent1"/>
+          </a:fillRef>
+          <a:effectRef idx="2">
+            <a:schemeClr val="accent1"/>
+          </a:effectRef>
+          <a:fontRef idx="minor">
+            <a:schemeClr val="lt1"/>
+          </a:fontRef>
+        </p:style>
+        <p:txBody>
+          <a:bodyPr rtlCol="0" anchor="ctr"/>
+          <a:lstStyle/>
+          <a:p>
+            <a:pPr algn="ctr"/>
+          </a:p>
+        </p:txBody>
+      </p:sp>
+      <p:sp>
+        <p:nvSpPr>
+          <p:cNvPr id="6" name="TextBox 5"/>
           <p:cNvSpPr txBox="1"/>
           <p:nvPr/>
         </p:nvSpPr>
         <p:spPr>
           <a:xfrm>
-            <a:off x="731520" y="1645920"/>
-            <a:ext cx="10698480" cy="4572000"/>
+            <a:off x="548640" y="6455664"/>
+            <a:ext cx="7772400" cy="320040"/>
           </a:xfrm>
           <a:prstGeom prst="rect">
             <a:avLst/>
@@ -3512,29 +8294,1186 @@
           <a:noFill/>
         </p:spPr>
         <p:txBody>
-          <a:bodyPr wrap="none">
+          <a:bodyPr wrap="none" lIns="0" tIns="0">
             <a:spAutoFit/>
           </a:bodyPr>
           <a:lstStyle/>
           <a:p>
             <a:pPr>
-              <a:defRPr sz="1800"/>
-            </a:pPr>
-            <a:r>
-              <a:t>Slide 5: Deliverables E, F and Future Directions</a:t>
-            </a:r>
-            <a:br/>
-            <a:br/>
-            <a:r>
-              <a:t>- Error Distribution: Hardest plots identified in extreme altitude / rainfall bands</a:t>
-            </a:r>
-            <a:br/>
-            <a:r>
-              <a:t>- Live Prediction Demo: Automated weather and price lookup with revenue output in Birr</a:t>
-            </a:r>
-            <a:br/>
-            <a:r>
-              <a:t>- Policy Recommendation: Targeted extension services for smallholder cooperatives</a:t>
+              <a:defRPr sz="900">
+                <a:solidFill>
+                  <a:srgbClr val="64748B"/>
+                </a:solidFill>
+                <a:latin typeface="Calibri"/>
+              </a:defRPr>
+            </a:pPr>
+            <a:r>
+              <a:t>Team 11 | Ethiopian Smallholder Crop-Yield Challenge | AAU AI Hackathon 2026</a:t>
+            </a:r>
+          </a:p>
+        </p:txBody>
+      </p:sp>
+      <p:sp>
+        <p:nvSpPr>
+          <p:cNvPr id="7" name="TextBox 6"/>
+          <p:cNvSpPr txBox="1"/>
+          <p:nvPr/>
+        </p:nvSpPr>
+        <p:spPr>
+          <a:xfrm>
+            <a:off x="9811512" y="6455664"/>
+            <a:ext cx="1828800" cy="320040"/>
+          </a:xfrm>
+          <a:prstGeom prst="rect">
+            <a:avLst/>
+          </a:prstGeom>
+          <a:noFill/>
+        </p:spPr>
+        <p:txBody>
+          <a:bodyPr wrap="none" rIns="0" tIns="0">
+            <a:spAutoFit/>
+          </a:bodyPr>
+          <a:lstStyle/>
+          <a:p>
+            <a:pPr algn="r">
+              <a:defRPr sz="900" b="1">
+                <a:solidFill>
+                  <a:srgbClr val="143D2B"/>
+                </a:solidFill>
+                <a:latin typeface="Calibri"/>
+              </a:defRPr>
+            </a:pPr>
+            <a:r>
+              <a:t>Slide 5 of 5</a:t>
+            </a:r>
+          </a:p>
+        </p:txBody>
+      </p:sp>
+      <p:sp>
+        <p:nvSpPr>
+          <p:cNvPr id="8" name="Rounded Rectangle 7"/>
+          <p:cNvSpPr/>
+          <p:nvPr/>
+        </p:nvSpPr>
+        <p:spPr>
+          <a:xfrm>
+            <a:off x="548640" y="1645920"/>
+            <a:ext cx="2633472" cy="841248"/>
+          </a:xfrm>
+          <a:prstGeom prst="roundRect">
+            <a:avLst/>
+          </a:prstGeom>
+          <a:solidFill>
+            <a:srgbClr val="FFFFFF"/>
+          </a:solidFill>
+          <a:ln w="12700">
+            <a:solidFill>
+              <a:srgbClr val="E2E8F0"/>
+            </a:solidFill>
+          </a:ln>
+        </p:spPr>
+        <p:style>
+          <a:lnRef idx="1">
+            <a:schemeClr val="accent1"/>
+          </a:lnRef>
+          <a:fillRef idx="3">
+            <a:schemeClr val="accent1"/>
+          </a:fillRef>
+          <a:effectRef idx="2">
+            <a:schemeClr val="accent1"/>
+          </a:effectRef>
+          <a:fontRef idx="minor">
+            <a:schemeClr val="lt1"/>
+          </a:fontRef>
+        </p:style>
+        <p:txBody>
+          <a:bodyPr rtlCol="0" anchor="ctr"/>
+          <a:lstStyle/>
+          <a:p>
+            <a:pPr algn="ctr"/>
+          </a:p>
+        </p:txBody>
+      </p:sp>
+      <p:sp>
+        <p:nvSpPr>
+          <p:cNvPr id="9" name="Rounded Rectangle 8"/>
+          <p:cNvSpPr/>
+          <p:nvPr/>
+        </p:nvSpPr>
+        <p:spPr>
+          <a:xfrm>
+            <a:off x="548640" y="1645920"/>
+            <a:ext cx="2633472" cy="54864"/>
+          </a:xfrm>
+          <a:prstGeom prst="roundRect">
+            <a:avLst/>
+          </a:prstGeom>
+          <a:solidFill>
+            <a:srgbClr val="15803D"/>
+          </a:solidFill>
+          <a:ln>
+            <a:noFill/>
+          </a:ln>
+        </p:spPr>
+        <p:style>
+          <a:lnRef idx="1">
+            <a:schemeClr val="accent1"/>
+          </a:lnRef>
+          <a:fillRef idx="3">
+            <a:schemeClr val="accent1"/>
+          </a:fillRef>
+          <a:effectRef idx="2">
+            <a:schemeClr val="accent1"/>
+          </a:effectRef>
+          <a:fontRef idx="minor">
+            <a:schemeClr val="lt1"/>
+          </a:fontRef>
+        </p:style>
+        <p:txBody>
+          <a:bodyPr rtlCol="0" anchor="ctr"/>
+          <a:lstStyle/>
+          <a:p>
+            <a:pPr algn="ctr"/>
+          </a:p>
+        </p:txBody>
+      </p:sp>
+      <p:sp>
+        <p:nvSpPr>
+          <p:cNvPr id="10" name="TextBox 9"/>
+          <p:cNvSpPr txBox="1"/>
+          <p:nvPr/>
+        </p:nvSpPr>
+        <p:spPr>
+          <a:xfrm>
+            <a:off x="548640" y="1719072"/>
+            <a:ext cx="2633472" cy="749808"/>
+          </a:xfrm>
+          <a:prstGeom prst="rect">
+            <a:avLst/>
+          </a:prstGeom>
+          <a:noFill/>
+        </p:spPr>
+        <p:txBody>
+          <a:bodyPr wrap="square" lIns="127000" rIns="127000" tIns="50800" bIns="50800">
+            <a:spAutoFit/>
+          </a:bodyPr>
+          <a:lstStyle/>
+          <a:p>
+            <a:pPr>
+              <a:defRPr sz="2100" b="1">
+                <a:solidFill>
+                  <a:srgbClr val="15803D"/>
+                </a:solidFill>
+                <a:latin typeface="Calibri"/>
+              </a:defRPr>
+            </a:pPr>
+            <a:r>
+              <a:t>Live Streamlit</a:t>
+            </a:r>
+          </a:p>
+          <a:p>
+            <a:pPr>
+              <a:spcBef>
+                <a:spcPts val="100"/>
+              </a:spcBef>
+              <a:defRPr sz="1000" b="1">
+                <a:solidFill>
+                  <a:srgbClr val="0F172A"/>
+                </a:solidFill>
+                <a:latin typeface="Calibri"/>
+              </a:defRPr>
+            </a:pPr>
+            <a:r>
+              <a:t>Production Decision Platform</a:t>
+            </a:r>
+          </a:p>
+          <a:p>
+            <a:pPr>
+              <a:spcBef>
+                <a:spcPts val="100"/>
+              </a:spcBef>
+              <a:defRPr sz="850">
+                <a:solidFill>
+                  <a:srgbClr val="64748B"/>
+                </a:solidFill>
+                <a:latin typeface="Calibri"/>
+              </a:defRPr>
+            </a:pPr>
+            <a:r>
+              <a:t>Launch: streamlit run app/app.py</a:t>
+            </a:r>
+          </a:p>
+        </p:txBody>
+      </p:sp>
+      <p:sp>
+        <p:nvSpPr>
+          <p:cNvPr id="11" name="Rounded Rectangle 10"/>
+          <p:cNvSpPr/>
+          <p:nvPr/>
+        </p:nvSpPr>
+        <p:spPr>
+          <a:xfrm>
+            <a:off x="3364992" y="1645920"/>
+            <a:ext cx="2633472" cy="841248"/>
+          </a:xfrm>
+          <a:prstGeom prst="roundRect">
+            <a:avLst/>
+          </a:prstGeom>
+          <a:solidFill>
+            <a:srgbClr val="FFFFFF"/>
+          </a:solidFill>
+          <a:ln w="12700">
+            <a:solidFill>
+              <a:srgbClr val="E2E8F0"/>
+            </a:solidFill>
+          </a:ln>
+        </p:spPr>
+        <p:style>
+          <a:lnRef idx="1">
+            <a:schemeClr val="accent1"/>
+          </a:lnRef>
+          <a:fillRef idx="3">
+            <a:schemeClr val="accent1"/>
+          </a:fillRef>
+          <a:effectRef idx="2">
+            <a:schemeClr val="accent1"/>
+          </a:effectRef>
+          <a:fontRef idx="minor">
+            <a:schemeClr val="lt1"/>
+          </a:fontRef>
+        </p:style>
+        <p:txBody>
+          <a:bodyPr rtlCol="0" anchor="ctr"/>
+          <a:lstStyle/>
+          <a:p>
+            <a:pPr algn="ctr"/>
+          </a:p>
+        </p:txBody>
+      </p:sp>
+      <p:sp>
+        <p:nvSpPr>
+          <p:cNvPr id="12" name="Rounded Rectangle 11"/>
+          <p:cNvSpPr/>
+          <p:nvPr/>
+        </p:nvSpPr>
+        <p:spPr>
+          <a:xfrm>
+            <a:off x="3364992" y="1645920"/>
+            <a:ext cx="2633472" cy="54864"/>
+          </a:xfrm>
+          <a:prstGeom prst="roundRect">
+            <a:avLst/>
+          </a:prstGeom>
+          <a:solidFill>
+            <a:srgbClr val="15803D"/>
+          </a:solidFill>
+          <a:ln>
+            <a:noFill/>
+          </a:ln>
+        </p:spPr>
+        <p:style>
+          <a:lnRef idx="1">
+            <a:schemeClr val="accent1"/>
+          </a:lnRef>
+          <a:fillRef idx="3">
+            <a:schemeClr val="accent1"/>
+          </a:fillRef>
+          <a:effectRef idx="2">
+            <a:schemeClr val="accent1"/>
+          </a:effectRef>
+          <a:fontRef idx="minor">
+            <a:schemeClr val="lt1"/>
+          </a:fontRef>
+        </p:style>
+        <p:txBody>
+          <a:bodyPr rtlCol="0" anchor="ctr"/>
+          <a:lstStyle/>
+          <a:p>
+            <a:pPr algn="ctr"/>
+          </a:p>
+        </p:txBody>
+      </p:sp>
+      <p:sp>
+        <p:nvSpPr>
+          <p:cNvPr id="13" name="TextBox 12"/>
+          <p:cNvSpPr txBox="1"/>
+          <p:nvPr/>
+        </p:nvSpPr>
+        <p:spPr>
+          <a:xfrm>
+            <a:off x="3364992" y="1719072"/>
+            <a:ext cx="2633472" cy="749808"/>
+          </a:xfrm>
+          <a:prstGeom prst="rect">
+            <a:avLst/>
+          </a:prstGeom>
+          <a:noFill/>
+        </p:spPr>
+        <p:txBody>
+          <a:bodyPr wrap="square" lIns="127000" rIns="127000" tIns="50800" bIns="50800">
+            <a:spAutoFit/>
+          </a:bodyPr>
+          <a:lstStyle/>
+          <a:p>
+            <a:pPr>
+              <a:defRPr sz="2100" b="1">
+                <a:solidFill>
+                  <a:srgbClr val="15803D"/>
+                </a:solidFill>
+                <a:latin typeface="Calibri"/>
+              </a:defRPr>
+            </a:pPr>
+            <a:r>
+              <a:t>86.9%</a:t>
+            </a:r>
+          </a:p>
+          <a:p>
+            <a:pPr>
+              <a:spcBef>
+                <a:spcPts val="100"/>
+              </a:spcBef>
+              <a:defRPr sz="1000" b="1">
+                <a:solidFill>
+                  <a:srgbClr val="0F172A"/>
+                </a:solidFill>
+                <a:latin typeface="Calibri"/>
+              </a:defRPr>
+            </a:pPr>
+            <a:r>
+              <a:t>Food Security Tier Accuracy</a:t>
+            </a:r>
+          </a:p>
+          <a:p>
+            <a:pPr>
+              <a:spcBef>
+                <a:spcPts val="100"/>
+              </a:spcBef>
+              <a:defRPr sz="850">
+                <a:solidFill>
+                  <a:srgbClr val="64748B"/>
+                </a:solidFill>
+                <a:latin typeface="Calibri"/>
+              </a:defRPr>
+            </a:pPr>
+            <a:r>
+              <a:t>0.0% Extreme Off-Diagonal Errors</a:t>
+            </a:r>
+          </a:p>
+        </p:txBody>
+      </p:sp>
+      <p:sp>
+        <p:nvSpPr>
+          <p:cNvPr id="14" name="Rounded Rectangle 13"/>
+          <p:cNvSpPr/>
+          <p:nvPr/>
+        </p:nvSpPr>
+        <p:spPr>
+          <a:xfrm>
+            <a:off x="6181344" y="1645920"/>
+            <a:ext cx="2633472" cy="841248"/>
+          </a:xfrm>
+          <a:prstGeom prst="roundRect">
+            <a:avLst/>
+          </a:prstGeom>
+          <a:solidFill>
+            <a:srgbClr val="FFFFFF"/>
+          </a:solidFill>
+          <a:ln w="12700">
+            <a:solidFill>
+              <a:srgbClr val="E2E8F0"/>
+            </a:solidFill>
+          </a:ln>
+        </p:spPr>
+        <p:style>
+          <a:lnRef idx="1">
+            <a:schemeClr val="accent1"/>
+          </a:lnRef>
+          <a:fillRef idx="3">
+            <a:schemeClr val="accent1"/>
+          </a:fillRef>
+          <a:effectRef idx="2">
+            <a:schemeClr val="accent1"/>
+          </a:effectRef>
+          <a:fontRef idx="minor">
+            <a:schemeClr val="lt1"/>
+          </a:fontRef>
+        </p:style>
+        <p:txBody>
+          <a:bodyPr rtlCol="0" anchor="ctr"/>
+          <a:lstStyle/>
+          <a:p>
+            <a:pPr algn="ctr"/>
+          </a:p>
+        </p:txBody>
+      </p:sp>
+      <p:sp>
+        <p:nvSpPr>
+          <p:cNvPr id="15" name="Rounded Rectangle 14"/>
+          <p:cNvSpPr/>
+          <p:nvPr/>
+        </p:nvSpPr>
+        <p:spPr>
+          <a:xfrm>
+            <a:off x="6181344" y="1645920"/>
+            <a:ext cx="2633472" cy="54864"/>
+          </a:xfrm>
+          <a:prstGeom prst="roundRect">
+            <a:avLst/>
+          </a:prstGeom>
+          <a:solidFill>
+            <a:srgbClr val="D97706"/>
+          </a:solidFill>
+          <a:ln>
+            <a:noFill/>
+          </a:ln>
+        </p:spPr>
+        <p:style>
+          <a:lnRef idx="1">
+            <a:schemeClr val="accent1"/>
+          </a:lnRef>
+          <a:fillRef idx="3">
+            <a:schemeClr val="accent1"/>
+          </a:fillRef>
+          <a:effectRef idx="2">
+            <a:schemeClr val="accent1"/>
+          </a:effectRef>
+          <a:fontRef idx="minor">
+            <a:schemeClr val="lt1"/>
+          </a:fontRef>
+        </p:style>
+        <p:txBody>
+          <a:bodyPr rtlCol="0" anchor="ctr"/>
+          <a:lstStyle/>
+          <a:p>
+            <a:pPr algn="ctr"/>
+          </a:p>
+        </p:txBody>
+      </p:sp>
+      <p:sp>
+        <p:nvSpPr>
+          <p:cNvPr id="16" name="TextBox 15"/>
+          <p:cNvSpPr txBox="1"/>
+          <p:nvPr/>
+        </p:nvSpPr>
+        <p:spPr>
+          <a:xfrm>
+            <a:off x="6181344" y="1719072"/>
+            <a:ext cx="2633472" cy="749808"/>
+          </a:xfrm>
+          <a:prstGeom prst="rect">
+            <a:avLst/>
+          </a:prstGeom>
+          <a:noFill/>
+        </p:spPr>
+        <p:txBody>
+          <a:bodyPr wrap="square" lIns="127000" rIns="127000" tIns="50800" bIns="50800">
+            <a:spAutoFit/>
+          </a:bodyPr>
+          <a:lstStyle/>
+          <a:p>
+            <a:pPr>
+              <a:defRPr sz="2100" b="1">
+                <a:solidFill>
+                  <a:srgbClr val="D97706"/>
+                </a:solidFill>
+                <a:latin typeface="Calibri"/>
+              </a:defRPr>
+            </a:pPr>
+            <a:r>
+              <a:t>&lt;300 ms</a:t>
+            </a:r>
+          </a:p>
+          <a:p>
+            <a:pPr>
+              <a:spcBef>
+                <a:spcPts val="100"/>
+              </a:spcBef>
+              <a:defRPr sz="1000" b="1">
+                <a:solidFill>
+                  <a:srgbClr val="0F172A"/>
+                </a:solidFill>
+                <a:latin typeface="Calibri"/>
+              </a:defRPr>
+            </a:pPr>
+            <a:r>
+              <a:t>Cached App Inference Latency</a:t>
+            </a:r>
+          </a:p>
+          <a:p>
+            <a:pPr>
+              <a:spcBef>
+                <a:spcPts val="100"/>
+              </a:spcBef>
+              <a:defRPr sz="850">
+                <a:solidFill>
+                  <a:srgbClr val="64748B"/>
+                </a:solidFill>
+                <a:latin typeface="Calibri"/>
+              </a:defRPr>
+            </a:pPr>
+            <a:r>
+              <a:t>Zero-Lag Slider Simulation</a:t>
+            </a:r>
+          </a:p>
+        </p:txBody>
+      </p:sp>
+      <p:sp>
+        <p:nvSpPr>
+          <p:cNvPr id="17" name="Rounded Rectangle 16"/>
+          <p:cNvSpPr/>
+          <p:nvPr/>
+        </p:nvSpPr>
+        <p:spPr>
+          <a:xfrm>
+            <a:off x="8997696" y="1645920"/>
+            <a:ext cx="2633472" cy="841248"/>
+          </a:xfrm>
+          <a:prstGeom prst="roundRect">
+            <a:avLst/>
+          </a:prstGeom>
+          <a:solidFill>
+            <a:srgbClr val="FFFFFF"/>
+          </a:solidFill>
+          <a:ln w="12700">
+            <a:solidFill>
+              <a:srgbClr val="E2E8F0"/>
+            </a:solidFill>
+          </a:ln>
+        </p:spPr>
+        <p:style>
+          <a:lnRef idx="1">
+            <a:schemeClr val="accent1"/>
+          </a:lnRef>
+          <a:fillRef idx="3">
+            <a:schemeClr val="accent1"/>
+          </a:fillRef>
+          <a:effectRef idx="2">
+            <a:schemeClr val="accent1"/>
+          </a:effectRef>
+          <a:fontRef idx="minor">
+            <a:schemeClr val="lt1"/>
+          </a:fontRef>
+        </p:style>
+        <p:txBody>
+          <a:bodyPr rtlCol="0" anchor="ctr"/>
+          <a:lstStyle/>
+          <a:p>
+            <a:pPr algn="ctr"/>
+          </a:p>
+        </p:txBody>
+      </p:sp>
+      <p:sp>
+        <p:nvSpPr>
+          <p:cNvPr id="18" name="Rounded Rectangle 17"/>
+          <p:cNvSpPr/>
+          <p:nvPr/>
+        </p:nvSpPr>
+        <p:spPr>
+          <a:xfrm>
+            <a:off x="8997696" y="1645920"/>
+            <a:ext cx="2633472" cy="54864"/>
+          </a:xfrm>
+          <a:prstGeom prst="roundRect">
+            <a:avLst/>
+          </a:prstGeom>
+          <a:solidFill>
+            <a:srgbClr val="0369A1"/>
+          </a:solidFill>
+          <a:ln>
+            <a:noFill/>
+          </a:ln>
+        </p:spPr>
+        <p:style>
+          <a:lnRef idx="1">
+            <a:schemeClr val="accent1"/>
+          </a:lnRef>
+          <a:fillRef idx="3">
+            <a:schemeClr val="accent1"/>
+          </a:fillRef>
+          <a:effectRef idx="2">
+            <a:schemeClr val="accent1"/>
+          </a:effectRef>
+          <a:fontRef idx="minor">
+            <a:schemeClr val="lt1"/>
+          </a:fontRef>
+        </p:style>
+        <p:txBody>
+          <a:bodyPr rtlCol="0" anchor="ctr"/>
+          <a:lstStyle/>
+          <a:p>
+            <a:pPr algn="ctr"/>
+          </a:p>
+        </p:txBody>
+      </p:sp>
+      <p:sp>
+        <p:nvSpPr>
+          <p:cNvPr id="19" name="TextBox 18"/>
+          <p:cNvSpPr txBox="1"/>
+          <p:nvPr/>
+        </p:nvSpPr>
+        <p:spPr>
+          <a:xfrm>
+            <a:off x="8997696" y="1719072"/>
+            <a:ext cx="2633472" cy="749808"/>
+          </a:xfrm>
+          <a:prstGeom prst="rect">
+            <a:avLst/>
+          </a:prstGeom>
+          <a:noFill/>
+        </p:spPr>
+        <p:txBody>
+          <a:bodyPr wrap="square" lIns="127000" rIns="127000" tIns="50800" bIns="50800">
+            <a:spAutoFit/>
+          </a:bodyPr>
+          <a:lstStyle/>
+          <a:p>
+            <a:pPr>
+              <a:defRPr sz="2100" b="1">
+                <a:solidFill>
+                  <a:srgbClr val="0369A1"/>
+                </a:solidFill>
+                <a:latin typeface="Calibri"/>
+              </a:defRPr>
+            </a:pPr>
+            <a:r>
+              <a:t>4 Workspaces</a:t>
+            </a:r>
+          </a:p>
+          <a:p>
+            <a:pPr>
+              <a:spcBef>
+                <a:spcPts val="100"/>
+              </a:spcBef>
+              <a:defRPr sz="1000" b="1">
+                <a:solidFill>
+                  <a:srgbClr val="0F172A"/>
+                </a:solidFill>
+                <a:latin typeface="Calibri"/>
+              </a:defRPr>
+            </a:pPr>
+            <a:r>
+              <a:t>Streamlined User Navigation</a:t>
+            </a:r>
+          </a:p>
+          <a:p>
+            <a:pPr>
+              <a:spcBef>
+                <a:spcPts val="100"/>
+              </a:spcBef>
+              <a:defRPr sz="850">
+                <a:solidFill>
+                  <a:srgbClr val="64748B"/>
+                </a:solidFill>
+                <a:latin typeface="Calibri"/>
+              </a:defRPr>
+            </a:pPr>
+            <a:r>
+              <a:t>Farmgate, Union, Radar &amp; Audit</a:t>
+            </a:r>
+          </a:p>
+        </p:txBody>
+      </p:sp>
+      <p:sp>
+        <p:nvSpPr>
+          <p:cNvPr id="20" name="Rounded Rectangle 19"/>
+          <p:cNvSpPr/>
+          <p:nvPr/>
+        </p:nvSpPr>
+        <p:spPr>
+          <a:xfrm>
+            <a:off x="548640" y="2651760"/>
+            <a:ext cx="4892040" cy="3621024"/>
+          </a:xfrm>
+          <a:prstGeom prst="roundRect">
+            <a:avLst/>
+          </a:prstGeom>
+          <a:solidFill>
+            <a:srgbClr val="FFFFFF"/>
+          </a:solidFill>
+          <a:ln w="12700">
+            <a:solidFill>
+              <a:srgbClr val="E2E8F0"/>
+            </a:solidFill>
+          </a:ln>
+        </p:spPr>
+        <p:style>
+          <a:lnRef idx="1">
+            <a:schemeClr val="accent1"/>
+          </a:lnRef>
+          <a:fillRef idx="3">
+            <a:schemeClr val="accent1"/>
+          </a:fillRef>
+          <a:effectRef idx="2">
+            <a:schemeClr val="accent1"/>
+          </a:effectRef>
+          <a:fontRef idx="minor">
+            <a:schemeClr val="lt1"/>
+          </a:fontRef>
+        </p:style>
+        <p:txBody>
+          <a:bodyPr rtlCol="0" anchor="ctr"/>
+          <a:lstStyle/>
+          <a:p>
+            <a:pPr algn="ctr"/>
+          </a:p>
+        </p:txBody>
+      </p:sp>
+      <p:sp>
+        <p:nvSpPr>
+          <p:cNvPr id="21" name="TextBox 20"/>
+          <p:cNvSpPr txBox="1"/>
+          <p:nvPr/>
+        </p:nvSpPr>
+        <p:spPr>
+          <a:xfrm>
+            <a:off x="685800" y="2761488"/>
+            <a:ext cx="4617720" cy="411480"/>
+          </a:xfrm>
+          <a:prstGeom prst="rect">
+            <a:avLst/>
+          </a:prstGeom>
+          <a:noFill/>
+        </p:spPr>
+        <p:txBody>
+          <a:bodyPr wrap="square" lIns="0" tIns="0">
+            <a:spAutoFit/>
+          </a:bodyPr>
+          <a:lstStyle/>
+          <a:p>
+            <a:pPr>
+              <a:defRPr sz="1300" b="1">
+                <a:solidFill>
+                  <a:srgbClr val="143D2B"/>
+                </a:solidFill>
+                <a:latin typeface="Calibri"/>
+              </a:defRPr>
+            </a:pPr>
+            <a:r>
+              <a:t>1. Food Security Policy Audit (Figure 13)</a:t>
+            </a:r>
+          </a:p>
+        </p:txBody>
+      </p:sp>
+      <p:pic>
+        <p:nvPicPr>
+          <p:cNvPr id="22" name="Picture 21" descr="fig13_yield_tier_confusion_matrix.png"/>
+          <p:cNvPicPr>
+            <a:picLocks noChangeAspect="1"/>
+          </p:cNvPicPr>
+          <p:nvPr/>
+        </p:nvPicPr>
+        <p:blipFill>
+          <a:blip r:embed="rId2"/>
+          <a:stretch>
+            <a:fillRect/>
+          </a:stretch>
+        </p:blipFill>
+        <p:spPr>
+          <a:xfrm>
+            <a:off x="713232" y="3108960"/>
+            <a:ext cx="4562856" cy="1920240"/>
+          </a:xfrm>
+          <a:prstGeom prst="rect">
+            <a:avLst/>
+          </a:prstGeom>
+        </p:spPr>
+      </p:pic>
+      <p:sp>
+        <p:nvSpPr>
+          <p:cNvPr id="23" name="TextBox 22"/>
+          <p:cNvSpPr txBox="1"/>
+          <p:nvPr/>
+        </p:nvSpPr>
+        <p:spPr>
+          <a:xfrm>
+            <a:off x="713232" y="5074920"/>
+            <a:ext cx="4562856" cy="1051560"/>
+          </a:xfrm>
+          <a:prstGeom prst="rect">
+            <a:avLst/>
+          </a:prstGeom>
+          <a:noFill/>
+        </p:spPr>
+        <p:txBody>
+          <a:bodyPr wrap="square">
+            <a:spAutoFit/>
+          </a:bodyPr>
+          <a:lstStyle/>
+          <a:p>
+            <a:pPr>
+              <a:spcBef>
+                <a:spcPts val="500"/>
+              </a:spcBef>
+              <a:defRPr sz="919">
+                <a:latin typeface="Calibri"/>
+              </a:defRPr>
+            </a:pPr>
+            <a:r>
+              <a:rPr b="1">
+                <a:solidFill>
+                  <a:srgbClr val="15803D"/>
+                </a:solidFill>
+              </a:rPr>
+              <a:t>• </a:t>
+            </a:r>
+            <a:r>
+              <a:rPr b="1">
+                <a:solidFill>
+                  <a:srgbClr val="0F172A"/>
+                </a:solidFill>
+              </a:rPr>
+              <a:t>86.9% Stratified Tier Accuracy: </a:t>
+            </a:r>
+            <a:r>
+              <a:rPr b="0">
+                <a:solidFill>
+                  <a:srgbClr val="0F172A"/>
+                </a:solidFill>
+              </a:rPr>
+              <a:t>13,115 of 15,090 plots fall on the exact diagonal tier (&lt;2.0, 2.0–3.5, &gt;3.5 t/ha).</a:t>
+            </a:r>
+          </a:p>
+          <a:p>
+            <a:pPr>
+              <a:spcBef>
+                <a:spcPts val="300"/>
+              </a:spcBef>
+              <a:defRPr sz="919">
+                <a:latin typeface="Calibri"/>
+              </a:defRPr>
+            </a:pPr>
+            <a:r>
+              <a:rPr b="1">
+                <a:solidFill>
+                  <a:srgbClr val="15803D"/>
+                </a:solidFill>
+              </a:rPr>
+              <a:t>• </a:t>
+            </a:r>
+            <a:r>
+              <a:rPr b="1">
+                <a:solidFill>
+                  <a:srgbClr val="0F172A"/>
+                </a:solidFill>
+              </a:rPr>
+              <a:t>0.0% Extreme Error Rate: </a:t>
+            </a:r>
+            <a:r>
+              <a:rPr b="0">
+                <a:solidFill>
+                  <a:srgbClr val="0F172A"/>
+                </a:solidFill>
+              </a:rPr>
+              <a:t>Zero subsistence plots misdiagnosed as commercial surplus (0/4,894); zero false alarms.</a:t>
+            </a:r>
+          </a:p>
+          <a:p>
+            <a:pPr>
+              <a:spcBef>
+                <a:spcPts val="300"/>
+              </a:spcBef>
+              <a:defRPr sz="919">
+                <a:latin typeface="Calibri"/>
+              </a:defRPr>
+            </a:pPr>
+            <a:r>
+              <a:rPr b="1">
+                <a:solidFill>
+                  <a:srgbClr val="15803D"/>
+                </a:solidFill>
+              </a:rPr>
+              <a:t>• </a:t>
+            </a:r>
+            <a:r>
+              <a:rPr b="1">
+                <a:solidFill>
+                  <a:srgbClr val="0F172A"/>
+                </a:solidFill>
+              </a:rPr>
+              <a:t>93.9% Subsistence Precision: </a:t>
+            </a:r>
+            <a:r>
+              <a:rPr b="0">
+                <a:solidFill>
+                  <a:srgbClr val="0F172A"/>
+                </a:solidFill>
+              </a:rPr>
+              <a:t>Dependable trigger for micro-insurance payouts and safety-net grain distribution.</a:t>
+            </a:r>
+          </a:p>
+        </p:txBody>
+      </p:sp>
+      <p:sp>
+        <p:nvSpPr>
+          <p:cNvPr id="24" name="Rounded Rectangle 23"/>
+          <p:cNvSpPr/>
+          <p:nvPr/>
+        </p:nvSpPr>
+        <p:spPr>
+          <a:xfrm>
+            <a:off x="5623560" y="2651760"/>
+            <a:ext cx="6016752" cy="3621024"/>
+          </a:xfrm>
+          <a:prstGeom prst="roundRect">
+            <a:avLst/>
+          </a:prstGeom>
+          <a:solidFill>
+            <a:srgbClr val="FFFFFF"/>
+          </a:solidFill>
+          <a:ln w="12700">
+            <a:solidFill>
+              <a:srgbClr val="E2E8F0"/>
+            </a:solidFill>
+          </a:ln>
+        </p:spPr>
+        <p:style>
+          <a:lnRef idx="1">
+            <a:schemeClr val="accent1"/>
+          </a:lnRef>
+          <a:fillRef idx="3">
+            <a:schemeClr val="accent1"/>
+          </a:fillRef>
+          <a:effectRef idx="2">
+            <a:schemeClr val="accent1"/>
+          </a:effectRef>
+          <a:fontRef idx="minor">
+            <a:schemeClr val="lt1"/>
+          </a:fontRef>
+        </p:style>
+        <p:txBody>
+          <a:bodyPr rtlCol="0" anchor="ctr"/>
+          <a:lstStyle/>
+          <a:p>
+            <a:pPr algn="ctr"/>
+          </a:p>
+        </p:txBody>
+      </p:sp>
+      <p:sp>
+        <p:nvSpPr>
+          <p:cNvPr id="25" name="TextBox 24"/>
+          <p:cNvSpPr txBox="1"/>
+          <p:nvPr/>
+        </p:nvSpPr>
+        <p:spPr>
+          <a:xfrm>
+            <a:off x="5760720" y="2761488"/>
+            <a:ext cx="5742432" cy="411480"/>
+          </a:xfrm>
+          <a:prstGeom prst="rect">
+            <a:avLst/>
+          </a:prstGeom>
+          <a:noFill/>
+        </p:spPr>
+        <p:txBody>
+          <a:bodyPr wrap="square" lIns="0" tIns="0">
+            <a:spAutoFit/>
+          </a:bodyPr>
+          <a:lstStyle/>
+          <a:p>
+            <a:pPr>
+              <a:defRPr sz="1300" b="1">
+                <a:solidFill>
+                  <a:srgbClr val="143D2B"/>
+                </a:solidFill>
+                <a:latin typeface="Calibri"/>
+              </a:defRPr>
+            </a:pPr>
+            <a:r>
+              <a:t>2. AgriYield™ Pro Capabilities &amp; Live Demo Script</a:t>
+            </a:r>
+          </a:p>
+        </p:txBody>
+      </p:sp>
+      <p:sp>
+        <p:nvSpPr>
+          <p:cNvPr id="26" name="TextBox 25"/>
+          <p:cNvSpPr txBox="1"/>
+          <p:nvPr/>
+        </p:nvSpPr>
+        <p:spPr>
+          <a:xfrm>
+            <a:off x="5806440" y="3127248"/>
+            <a:ext cx="5650992" cy="3072384"/>
+          </a:xfrm>
+          <a:prstGeom prst="rect">
+            <a:avLst/>
+          </a:prstGeom>
+          <a:noFill/>
+        </p:spPr>
+        <p:txBody>
+          <a:bodyPr wrap="square">
+            <a:spAutoFit/>
+          </a:bodyPr>
+          <a:lstStyle/>
+          <a:p>
+            <a:pPr>
+              <a:spcBef>
+                <a:spcPts val="500"/>
+              </a:spcBef>
+              <a:defRPr sz="950">
+                <a:latin typeface="Calibri"/>
+              </a:defRPr>
+            </a:pPr>
+            <a:r>
+              <a:rPr b="1">
+                <a:solidFill>
+                  <a:srgbClr val="15803D"/>
+                </a:solidFill>
+              </a:rPr>
+              <a:t>• </a:t>
+            </a:r>
+            <a:r>
+              <a:rPr b="1">
+                <a:solidFill>
+                  <a:srgbClr val="0F172A"/>
+                </a:solidFill>
+              </a:rPr>
+              <a:t>1. Zero-Effort Background Ingestion (Rule 5 Compliant): </a:t>
+            </a:r>
+            <a:r>
+              <a:rPr b="0">
+                <a:solidFill>
+                  <a:srgbClr val="0F172A"/>
+                </a:solidFill>
+              </a:rPr>
+              <a:t>Farmers enter only agronomic inputs (Region, Crop, Farm Size in ha or Timad, DAP/Urea); seasonal climate variables (rainfall, mean temperature, heat days) and ECX market prices are automatically resolved in the background.</a:t>
+            </a:r>
+          </a:p>
+          <a:p>
+            <a:pPr>
+              <a:spcBef>
+                <a:spcPts val="400"/>
+              </a:spcBef>
+              <a:defRPr sz="950">
+                <a:latin typeface="Calibri"/>
+              </a:defRPr>
+            </a:pPr>
+            <a:r>
+              <a:rPr b="1">
+                <a:solidFill>
+                  <a:srgbClr val="15803D"/>
+                </a:solidFill>
+              </a:rPr>
+              <a:t>• </a:t>
+            </a:r>
+            <a:r>
+              <a:rPr b="1">
+                <a:solidFill>
+                  <a:srgbClr val="0F172A"/>
+                </a:solidFill>
+              </a:rPr>
+              <a:t>2. Real-Time Economic P&amp;L Translation: </a:t>
+            </a:r>
+            <a:r>
+              <a:rPr b="0">
+                <a:solidFill>
+                  <a:srgbClr val="0F172A"/>
+                </a:solidFill>
+              </a:rPr>
+              <a:t>Converts biological yield (t/ha) into audited household cash flow: Gross Revenue, Fertilizer, Certified Seed, and Net Family Profit in Ethiopian Birr (ETB), demonstrating household economic lift.</a:t>
+            </a:r>
+          </a:p>
+          <a:p>
+            <a:pPr>
+              <a:spcBef>
+                <a:spcPts val="400"/>
+              </a:spcBef>
+              <a:defRPr sz="950">
+                <a:latin typeface="Calibri"/>
+              </a:defRPr>
+            </a:pPr>
+            <a:r>
+              <a:rPr b="1">
+                <a:solidFill>
+                  <a:srgbClr val="15803D"/>
+                </a:solidFill>
+              </a:rPr>
+              <a:t>• </a:t>
+            </a:r>
+            <a:r>
+              <a:rPr b="1">
+                <a:solidFill>
+                  <a:srgbClr val="0F172A"/>
+                </a:solidFill>
+              </a:rPr>
+              <a:t>3. Dynamic 'What-If' Simulation (Dual-Axis Plotly): </a:t>
+            </a:r>
+            <a:r>
+              <a:rPr b="0">
+                <a:solidFill>
+                  <a:srgbClr val="0F172A"/>
+                </a:solidFill>
+              </a:rPr>
+              <a:t>Interactive slider curves plot harvest bags vs. net profit across fertilizer levels, automatically pinpointing the peak profit inflection point (e.g., 80 kg/ha) to prevent costly nitrogen wastage.</a:t>
+            </a:r>
+          </a:p>
+          <a:p>
+            <a:pPr>
+              <a:spcBef>
+                <a:spcPts val="400"/>
+              </a:spcBef>
+              <a:defRPr sz="950">
+                <a:latin typeface="Calibri"/>
+              </a:defRPr>
+            </a:pPr>
+            <a:r>
+              <a:rPr b="1">
+                <a:solidFill>
+                  <a:srgbClr val="15803D"/>
+                </a:solidFill>
+              </a:rPr>
+              <a:t>• </a:t>
+            </a:r>
+            <a:r>
+              <a:rPr b="1">
+                <a:solidFill>
+                  <a:srgbClr val="0F172A"/>
+                </a:solidFill>
+              </a:rPr>
+              <a:t>4. Cooperative Command Hub (15-Plot Union Fleet): </a:t>
+            </a:r>
+            <a:r>
+              <a:rPr b="0">
+                <a:solidFill>
+                  <a:srgbClr val="0F172A"/>
+                </a:solidFill>
+              </a:rPr>
+              <a:t>Multi-plot batch processing aggregates union member harvest totals, 100-kg jute bag storage demands, 40-Ton Isuzu freight fleets needed, and bankable collateral Loan-to-Value (LTV) ratios.</a:t>
+            </a:r>
+          </a:p>
+          <a:p>
+            <a:pPr>
+              <a:spcBef>
+                <a:spcPts val="400"/>
+              </a:spcBef>
+              <a:defRPr sz="950">
+                <a:latin typeface="Calibri"/>
+              </a:defRPr>
+            </a:pPr>
+            <a:r>
+              <a:rPr b="1">
+                <a:solidFill>
+                  <a:srgbClr val="15803D"/>
+                </a:solidFill>
+              </a:rPr>
+              <a:t>• </a:t>
+            </a:r>
+            <a:r>
+              <a:rPr b="1">
+                <a:solidFill>
+                  <a:srgbClr val="0F172A"/>
+                </a:solidFill>
+              </a:rPr>
+              <a:t>🎯 2-Minute Pitch Live Demo Flow: </a:t>
+            </a:r>
+            <a:r>
+              <a:rPr b="0">
+                <a:solidFill>
+                  <a:srgbClr val="0F172A"/>
+                </a:solidFill>
+              </a:rPr>
+              <a:t>• Minute 1 (Farmgate Studio): Click 'Arsi Maize (2.5 ha)' preset -&gt; observe auto climate/price resolution -&gt; adjust DAP/Urea slider to show live profit peak.
+• Minute 2 (Union Hub &amp; Audit): Switch to Cooperative Hub -&gt; review 15-plot grain totals &amp; truck fleet -&gt; review 86.9% food security tier audit matrix.</a:t>
             </a:r>
           </a:p>
         </p:txBody>
